--- a/lessons/btli101_xrw5fg/btli1_l10_slides.pptx
+++ b/lessons/btli101_xrw5fg/btli1_l10_slides.pptx
@@ -1531,7 +1531,7 @@
           <a:p>
             <a:r>
               <a:rPr lang="en-US" dirty="0"/>
-              <a:t>Ipaguhitan sa guide ang dahilan kung bakit ginawa ni Jesus ang Kaniyang ginawa: binigyan ko kayo ng halimbawa upang inyong tularan.</a:t>
+              <a:t>Sa guide, ipa-tap para guhitan ang dahilan kung bakit ginawa ni Jesus ang Kaniyang ginawa: binigyan ko kayo ng halimbawa upang inyong tularan (sa printed guide, guhitan ng pen).</a:t>
             </a:r>
             <a:endParaRPr lang="en-US" dirty="0"/>
           </a:p>
@@ -1985,7 +1985,7 @@
           <a:p>
             <a:r>
               <a:rPr lang="en-US" dirty="0"/>
-              <a:t>Ipabilog sa guide ang dalawang dahilan ni Jesus sa pagparito sa mundo: maglingkod, at mag-alay ng buhay.</a:t>
+              <a:t>Sa ikaapat na dahilan mamaya, ita-tap nila sa guide ang dalawang dahilan ni Jesus sa pagparito para bilugan: maglingkod, at mag-alay ng buhay (sa printed guide, bilugan ng pen).</a:t>
             </a:r>
           </a:p>
           <a:p>
@@ -4385,7 +4385,7 @@
           <a:p>
             <a:r>
               <a:rPr lang="en-US" dirty="0"/>
-              <a:t>Ipalagay sa guide: ekis sa salitang tamad, check sa magpakasipag at maglingkod.</a:t>
+              <a:t>Sa guide, ipa-tap ang mga salita: ang tamad para malagyan ng ekis, ang magpakasipag at maglingkod para ma-check (sa printed guide, gamitin ang pen).</a:t>
             </a:r>
           </a:p>
           <a:p>

--- a/lessons/btli101_xrw5fg/btli1_l10_slides.pptx
+++ b/lessons/btli101_xrw5fg/btli1_l10_slides.pptx
@@ -4,6 +4,9 @@
   <p:sldMasterIdLst>
     <p:sldMasterId id="2147483648" r:id="rId1"/>
   </p:sldMasterIdLst>
+  <p:notesMasterIdLst>
+    <p:notesMasterId r:id="rId32"/>
+  </p:notesMasterIdLst>
   <p:sldIdLst>
     <p:sldId id="256" r:id="rId2"/>
     <p:sldId id="257" r:id="rId3"/>
@@ -36,9 +39,6 @@
     <p:sldId id="284" r:id="rId30"/>
     <p:sldId id="285" r:id="rId31"/>
   </p:sldIdLst>
-  <p:notesMasterIdLst>
-    <p:notesMasterId r:id="rId32"/>
-  </p:notesMasterIdLst>
   <p:sldSz cx="12192000" cy="6858000"/>
   <p:notesSz cx="6858000" cy="12192000"/>
   <p:defaultTextStyle>
@@ -133,6 +133,11 @@
       </a:defRPr>
     </a:lvl9pPr>
   </p:defaultTextStyle>
+  <p:extLst>
+    <p:ext uri="{EFAFB233-063F-42B5-8137-9DF3F51BA10A}">
+      <p15:sldGuideLst xmlns:p15="http://schemas.microsoft.com/office/powerpoint/2012/main"/>
+    </p:ext>
+  </p:extLst>
 </p:presentation>
 </file>
 
@@ -158,234 +163,10 @@
           <a:chExt cx="0" cy="0"/>
         </a:xfrm>
       </p:grpSpPr>
-      <p:sp>
-        <p:nvSpPr>
-          <p:cNvPr id="2" name="Header Placeholder 1"/>
-          <p:cNvSpPr>
-            <a:spLocks noGrp="1"/>
-          </p:cNvSpPr>
-          <p:nvPr>
-            <p:ph type="hdr" sz="quarter"/>
-          </p:nvPr>
-        </p:nvSpPr>
-        <p:spPr>
-          <a:xfrm>
-            <a:off x="0" y="0"/>
-            <a:ext cx="2971800" cy="458788"/>
-          </a:xfrm>
-          <a:prstGeom prst="rect">
-            <a:avLst/>
-          </a:prstGeom>
-        </p:spPr>
-        <p:txBody>
-          <a:bodyPr vert="horz" lIns="91440" tIns="45720" rIns="91440" bIns="45720" rtlCol="0"/>
-          <a:lstStyle>
-            <a:lvl1pPr algn="l">
-              <a:defRPr sz="1200"/>
-            </a:lvl1pPr>
-          </a:lstStyle>
-          <a:p>
-            <a:endParaRPr lang="en-US"/>
-          </a:p>
-        </p:txBody>
-      </p:sp>
-      <p:sp>
-        <p:nvSpPr>
-          <p:cNvPr id="3" name="Date Placeholder 2"/>
-          <p:cNvSpPr>
-            <a:spLocks noGrp="1"/>
-          </p:cNvSpPr>
-          <p:nvPr>
-            <p:ph type="dt" idx="1"/>
-          </p:nvPr>
-        </p:nvSpPr>
-        <p:spPr>
-          <a:xfrm>
-            <a:off x="3884613" y="0"/>
-            <a:ext cx="2971800" cy="458788"/>
-          </a:xfrm>
-          <a:prstGeom prst="rect">
-            <a:avLst/>
-          </a:prstGeom>
-        </p:spPr>
-        <p:txBody>
-          <a:bodyPr vert="horz" lIns="91440" tIns="45720" rIns="91440" bIns="45720" rtlCol="0"/>
-          <a:lstStyle>
-            <a:lvl1pPr algn="r">
-              <a:defRPr sz="1200"/>
-            </a:lvl1pPr>
-          </a:lstStyle>
-          <a:p>
-            <a:fld id="{5282F153-3F37-0F45-9E97-73ACFA13230C}" type="datetimeFigureOut">
-              <a:rPr lang="en-US"/>
-              <a:t>7/23/19</a:t>
-            </a:fld>
-            <a:endParaRPr lang="en-US"/>
-          </a:p>
-        </p:txBody>
-      </p:sp>
-      <p:sp>
-        <p:nvSpPr>
-          <p:cNvPr id="4" name="Slide Image Placeholder 3"/>
-          <p:cNvSpPr>
-            <a:spLocks noGrp="1" noRot="1" noChangeAspect="1"/>
-          </p:cNvSpPr>
-          <p:nvPr>
-            <p:ph type="sldImg" idx="2"/>
-          </p:nvPr>
-        </p:nvSpPr>
-        <p:spPr>
-          <a:xfrm>
-            <a:off x="685800" y="1143000"/>
-            <a:ext cx="5486400" cy="3086100"/>
-          </a:xfrm>
-          <a:prstGeom prst="rect">
-            <a:avLst/>
-          </a:prstGeom>
-          <a:noFill/>
-          <a:ln w="12700">
-            <a:solidFill>
-              <a:prstClr val="black"/>
-            </a:solidFill>
-          </a:ln>
-        </p:spPr>
-        <p:txBody>
-          <a:bodyPr vert="horz" lIns="91440" tIns="45720" rIns="91440" bIns="45720" rtlCol="0" anchor="ctr"/>
-          <a:lstStyle/>
-          <a:p>
-            <a:endParaRPr lang="en-US"/>
-          </a:p>
-        </p:txBody>
-      </p:sp>
-      <p:sp>
-        <p:nvSpPr>
-          <p:cNvPr id="5" name="Notes Placeholder 4"/>
-          <p:cNvSpPr>
-            <a:spLocks noGrp="1"/>
-          </p:cNvSpPr>
-          <p:nvPr>
-            <p:ph type="body" sz="quarter" idx="3"/>
-          </p:nvPr>
-        </p:nvSpPr>
-        <p:spPr>
-          <a:xfrm>
-            <a:off x="685800" y="4400550"/>
-            <a:ext cx="5486400" cy="3600450"/>
-          </a:xfrm>
-          <a:prstGeom prst="rect">
-            <a:avLst/>
-          </a:prstGeom>
-        </p:spPr>
-        <p:txBody>
-          <a:bodyPr vert="horz" lIns="91440" tIns="45720" rIns="91440" bIns="45720" rtlCol="0"/>
-          <a:lstStyle/>
-          <a:p>
-            <a:pPr lvl="0"/>
-            <a:r>
-              <a:rPr lang="en-US"/>
-              <a:t>Click to edit Master text styles</a:t>
-            </a:r>
-          </a:p>
-          <a:p>
-            <a:pPr lvl="1"/>
-            <a:r>
-              <a:rPr lang="en-US"/>
-              <a:t>Second level</a:t>
-            </a:r>
-          </a:p>
-          <a:p>
-            <a:pPr lvl="2"/>
-            <a:r>
-              <a:rPr lang="en-US"/>
-              <a:t>Third level</a:t>
-            </a:r>
-          </a:p>
-          <a:p>
-            <a:pPr lvl="3"/>
-            <a:r>
-              <a:rPr lang="en-US"/>
-              <a:t>Fourth level</a:t>
-            </a:r>
-          </a:p>
-          <a:p>
-            <a:pPr lvl="4"/>
-            <a:r>
-              <a:rPr lang="en-US"/>
-              <a:t>Fifth level</a:t>
-            </a:r>
-          </a:p>
-        </p:txBody>
-      </p:sp>
-      <p:sp>
-        <p:nvSpPr>
-          <p:cNvPr id="6" name="Footer Placeholder 5"/>
-          <p:cNvSpPr>
-            <a:spLocks noGrp="1"/>
-          </p:cNvSpPr>
-          <p:nvPr>
-            <p:ph type="ftr" sz="quarter" idx="4"/>
-          </p:nvPr>
-        </p:nvSpPr>
-        <p:spPr>
-          <a:xfrm>
-            <a:off x="0" y="8685213"/>
-            <a:ext cx="2971800" cy="458787"/>
-          </a:xfrm>
-          <a:prstGeom prst="rect">
-            <a:avLst/>
-          </a:prstGeom>
-        </p:spPr>
-        <p:txBody>
-          <a:bodyPr vert="horz" lIns="91440" tIns="45720" rIns="91440" bIns="45720" rtlCol="0" anchor="b"/>
-          <a:lstStyle>
-            <a:lvl1pPr algn="l">
-              <a:defRPr sz="1200"/>
-            </a:lvl1pPr>
-          </a:lstStyle>
-          <a:p>
-            <a:endParaRPr lang="en-US"/>
-          </a:p>
-        </p:txBody>
-      </p:sp>
-      <p:sp>
-        <p:nvSpPr>
-          <p:cNvPr id="7" name="Slide Number Placeholder 6"/>
-          <p:cNvSpPr>
-            <a:spLocks noGrp="1"/>
-          </p:cNvSpPr>
-          <p:nvPr>
-            <p:ph type="sldNum" sz="quarter" idx="5"/>
-          </p:nvPr>
-        </p:nvSpPr>
-        <p:spPr>
-          <a:xfrm>
-            <a:off x="3884613" y="8685213"/>
-            <a:ext cx="2971800" cy="458787"/>
-          </a:xfrm>
-          <a:prstGeom prst="rect">
-            <a:avLst/>
-          </a:prstGeom>
-        </p:spPr>
-        <p:txBody>
-          <a:bodyPr vert="horz" lIns="91440" tIns="45720" rIns="91440" bIns="45720" rtlCol="0" anchor="b"/>
-          <a:lstStyle>
-            <a:lvl1pPr algn="r">
-              <a:defRPr sz="1200"/>
-            </a:lvl1pPr>
-          </a:lstStyle>
-          <a:p>
-            <a:fld id="{CE5E9CC1-C706-0F49-92D6-E571CC5EEA8F}" type="slidenum">
-              <a:rPr lang="en-US"/>
-              <a:t>‹#›</a:t>
-            </a:fld>
-            <a:endParaRPr lang="en-US"/>
-          </a:p>
-        </p:txBody>
-      </p:sp>
     </p:spTree>
     <p:extLst>
       <p:ext uri="{BB962C8B-B14F-4D97-AF65-F5344CB8AC3E}">
-        <p14:creationId xmlns:p14="http://schemas.microsoft.com/office/powerpoint/2010/main" val="1024086991"/>
+        <p14:creationId xmlns:p14="http://schemas.microsoft.com/office/powerpoint/2010/main" val="2754657622"/>
       </p:ext>
     </p:extLst>
   </p:cSld>
@@ -569,7 +350,6 @@
               <a:rPr lang="en-US" dirty="0"/>
               <a:t>Opening prayer bago mag-verse.</a:t>
             </a:r>
-            <a:endParaRPr lang="en-US" dirty="0"/>
           </a:p>
         </p:txBody>
       </p:sp>
@@ -661,7 +441,11 @@
           <a:p>
             <a:r>
               <a:rPr lang="en-US" dirty="0"/>
-              <a:t>Apat na pangunahing rason kung bakit nararapat tayong maglingkod sa Dios — ang una: Ika'y binigyang-buhay.</a:t>
+              <a:t>Apat na pangunahing rason kung bakit nararapat tayong maglingkod sa Dios — </a:t>
+            </a:r>
+            <a:r>
+              <a:rPr lang="en-US" b="1" dirty="0"/>
+              <a:t>ang una: Ika'y binigyang-buhay.</a:t>
             </a:r>
           </a:p>
           <a:p>
@@ -697,9 +481,16 @@
           <a:p>
             <a:r>
               <a:rPr lang="en-US" dirty="0"/>
-              <a:t>Sa kabilang banda, nagkakaroon lang ng saysay ang ating limitadong buhay kapag ito ay ginugol para sa Dios (Acts 17:28) — binigyan tayo ng regalo ng buhay, gamitin natin ito para sa Kaniya na Nagbigay-buhay.</a:t>
-            </a:r>
-            <a:endParaRPr lang="en-US" dirty="0"/>
+              <a:t>Sa kabilang banda, </a:t>
+            </a:r>
+            <a:r>
+              <a:rPr lang="en-US" b="1" dirty="0"/>
+              <a:t>nagkakaroon lang ng saysay ang ating limitadong buhay kapag ito ay ginugol para sa Dios </a:t>
+            </a:r>
+            <a:r>
+              <a:rPr lang="en-US" dirty="0"/>
+              <a:t>(Acts 17:28) — binigyan tayo ng regalo ng buhay, gamitin natin ito para sa Kaniya na Nagbigay-buhay.</a:t>
+            </a:r>
           </a:p>
         </p:txBody>
       </p:sp>
@@ -808,16 +599,23 @@
           </a:p>
           <a:p>
             <a:r>
-              <a:rPr lang="en-US" dirty="0"/>
-              <a:t>Hanapin ang sagot na: may puwang sa puso na Dios lang ang makakapuno; ang paglilingkod sa ibang bagay ay nag-iiwan ng kaligaligan.</a:t>
-            </a:r>
-          </a:p>
-          <a:p>
-            <a:r>
-              <a:rPr lang="en-US" dirty="0"/>
-              <a:t>Ikabit sa turumpo: umiikot nang umiikot, pero walang pahinga hangga't hindi sa Kaniya nanganganlong.</a:t>
-            </a:r>
-            <a:endParaRPr lang="en-US" dirty="0"/>
+              <a:rPr lang="en-US" b="1" dirty="0"/>
+              <a:t>Hanapin ang sagot na: </a:t>
+            </a:r>
+            <a:r>
+              <a:rPr lang="en-US" dirty="0"/>
+              <a:t>may puwang sa puso na Dios lang ang makakapuno; ang paglilingkod sa ibang bagay ay nag-iiwan ng kaligaligan.</a:t>
+            </a:r>
+          </a:p>
+          <a:p>
+            <a:r>
+              <a:rPr lang="en-US" b="1" dirty="0"/>
+              <a:t>Ikabit sa turumpo: </a:t>
+            </a:r>
+            <a:r>
+              <a:rPr lang="en-US" dirty="0"/>
+              <a:t>umiikot nang umiikot, pero walang pahinga hangga't hindi sa Kaniya nanganganlong.</a:t>
+            </a:r>
           </a:p>
         </p:txBody>
       </p:sp>
@@ -925,24 +723,40 @@
             </a:r>
           </a:p>
           <a:p>
+            <a:pPr marL="228600" indent="-228600">
+              <a:buFont typeface="+mj-lt"/>
+              <a:buAutoNum type="arabicPeriod"/>
+            </a:pPr>
             <a:r>
               <a:rPr lang="en-US" dirty="0"/>
               <a:t>Una, Slaves — pinakamababang-uri; kadalasan prisoners-of-war mula sa natalong bansa; itinuturing na ari-arian; walang karapatang umangal o mamili; napipilitan lang.</a:t>
             </a:r>
           </a:p>
           <a:p>
+            <a:pPr marL="228600" indent="-228600">
+              <a:buFont typeface="+mj-lt"/>
+              <a:buAutoNum type="arabicPeriod"/>
+            </a:pPr>
             <a:r>
               <a:rPr lang="en-US" dirty="0"/>
               <a:t>Pangalawa, Hirelings — mga bayarang manggagawa na naglilingkod lang para sa pera, kita, o anumang benepisyo mula sa amo.</a:t>
             </a:r>
           </a:p>
           <a:p>
+            <a:pPr marL="228600" indent="-228600">
+              <a:buFont typeface="+mj-lt"/>
+              <a:buAutoNum type="arabicPeriod"/>
+            </a:pPr>
             <a:r>
               <a:rPr lang="en-US" dirty="0"/>
               <a:t>Pangatlo, Servant — naging alipin dahil sa pansariling utang o utang ng magulang; limitadong panahon lang, kadalasan anim na taon; may expiration date ang serbisyo; nagbabayad-utang lang.</a:t>
             </a:r>
           </a:p>
           <a:p>
+            <a:pPr marL="228600" indent="-228600">
+              <a:buFont typeface="+mj-lt"/>
+              <a:buAutoNum type="arabicPeriod"/>
+            </a:pPr>
             <a:r>
               <a:rPr lang="en-US" dirty="0"/>
               <a:t>Pang-apat, Bondservant — isang legit na Lingkod-for-Life: tapos na ang panahon ng serbisyo niya, pero ayaw na niyang umalis sapagkat mahal niya ang kaniyang amo, kaya magiging alipin siya habang buhay (Exodus 21:5-6).</a:t>
@@ -951,9 +765,16 @@
           <a:p>
             <a:r>
               <a:rPr lang="en-US" dirty="0"/>
-              <a:t>Ito ang paglilingkod na nag-uugat sa pagmamahal at pagpapasalamat — at ito ang favorite na designation ni Apostle Paul sa kaniyang sarili: bondservant ni Christ for life!</a:t>
-            </a:r>
-            <a:endParaRPr lang="en-US" dirty="0"/>
+              <a:t>Ito ang paglilingkod na nag-uugat sa pagmamahal at pagpapasalamat — </a:t>
+            </a:r>
+            <a:r>
+              <a:rPr lang="en-US" b="1" dirty="0"/>
+              <a:t>at ito ang favorite na designation ni Apostle Paul sa kaniyang sarili: </a:t>
+            </a:r>
+            <a:r>
+              <a:rPr lang="en-US" dirty="0"/>
+              <a:t>bondservant ni Christ for life!</a:t>
+            </a:r>
           </a:p>
         </p:txBody>
       </p:sp>
@@ -1057,7 +878,7 @@
           <a:p>
             <a:r>
               <a:rPr lang="en-US" dirty="0"/>
-              <a:t>Ang volunteers, namimili kung kailan at paano sila maglilingkod; ang servants, humahataw anumang oras, anumang gawain, basta kagustuhan ng Master.</a:t>
+              <a:t>Ang volunteers, namimili kung kailan at paano sila maglilingkod; ang servants, humahataw anumang oras, anumang gawain, basta kagustuhan ng Master. (Luke 17:10 in slide 10)</a:t>
             </a:r>
           </a:p>
           <a:p>
@@ -1077,7 +898,6 @@
               <a:rPr lang="en-US" dirty="0"/>
               <a:t>Itanong at hayaang nakabitin: Ikaw, volunteer ka lang ba o servant?</a:t>
             </a:r>
-            <a:endParaRPr lang="en-US" dirty="0"/>
           </a:p>
         </p:txBody>
       </p:sp>
@@ -1186,8 +1006,12 @@
           </a:p>
           <a:p>
             <a:r>
-              <a:rPr lang="en-US" dirty="0"/>
-              <a:t>Huwag ipilit na i-share — ito ang unang hakbang ng Bondservant Path sa TUGON: Suriin.</a:t>
+              <a:rPr lang="en-US" b="1" dirty="0"/>
+              <a:t>Huwag ipilit na i-share </a:t>
+            </a:r>
+            <a:r>
+              <a:rPr lang="en-US" dirty="0"/>
+              <a:t>— ito ang unang hakbang ng Bondservant Path sa TUGON: Suriin.</a:t>
             </a:r>
           </a:p>
           <a:p>
@@ -1195,7 +1019,6 @@
               <a:rPr lang="en-US" dirty="0"/>
               <a:t>Kapag may nag-share na hireling o servant pa lang siya, i-affirm ang katapatan; ang bondservant ay nagsisimula sa pag-amin.</a:t>
             </a:r>
-            <a:endParaRPr lang="en-US" dirty="0"/>
           </a:p>
         </p:txBody>
       </p:sp>
@@ -1297,9 +1120,44 @@
             </a:r>
           </a:p>
           <a:p>
-            <a:r>
-              <a:rPr lang="en-US" dirty="0"/>
-              <a:t>Ang isang taong umuusad sa pananampalataya ay hindi na lang tungkol sa kung ano ang maibibigay ng Panginoon sa kaniya, kundi kung ano ang maibibigay niya sa Panginoon.</a:t>
+            <a:pPr marL="0" marR="0" lvl="0" indent="0" algn="l" defTabSz="914400" rtl="0" eaLnBrk="1" fontAlgn="auto" latinLnBrk="0" hangingPunct="1">
+              <a:lnSpc>
+                <a:spcPct val="100000"/>
+              </a:lnSpc>
+              <a:spcBef>
+                <a:spcPts val="0"/>
+              </a:spcBef>
+              <a:spcAft>
+                <a:spcPts val="0"/>
+              </a:spcAft>
+              <a:buClrTx/>
+              <a:buSzTx/>
+              <a:buFontTx/>
+              <a:buNone/>
+              <a:tabLst/>
+              <a:defRPr/>
+            </a:pPr>
+            <a:r>
+              <a:rPr lang="en-US" b="1" dirty="0"/>
+              <a:t>Famous presidential statement: </a:t>
+            </a:r>
+            <a:r>
+              <a:rPr lang="en-US" dirty="0"/>
+              <a:t>Ask not what America can do for you; ask what you can do for America.</a:t>
+            </a:r>
+          </a:p>
+          <a:p>
+            <a:r>
+              <a:rPr lang="en-US" dirty="0"/>
+              <a:t>Ang isang taong umuusad sa pananampalataya ay hindi na lang tungkol sa kung ano ang maibibigay ng Panginoon sa kaniya, kundi kung ano ang maibibigay niya sa </a:t>
+            </a:r>
+            <a:r>
+              <a:rPr lang="en-US" dirty="0" err="1"/>
+              <a:t>Panginoon</a:t>
+            </a:r>
+            <a:r>
+              <a:rPr lang="en-US" dirty="0"/>
+              <a:t>.</a:t>
             </a:r>
           </a:p>
           <a:p>
@@ -1313,7 +1171,6 @@
               <a:rPr lang="en-US" dirty="0"/>
               <a:t>Pansinin ang salitang kabutihan — ang character anchor natin: ang kabutihang tinanggap ay nagiging kabutihang ibinibigay.</a:t>
             </a:r>
-            <a:endParaRPr lang="en-US" dirty="0"/>
           </a:p>
         </p:txBody>
       </p:sp>
@@ -1428,8 +1285,12 @@
           </a:p>
           <a:p>
             <a:r>
-              <a:rPr lang="en-US" dirty="0"/>
-              <a:t>KUWENTO — Ang Alila ng mga Alipin (basahin nang buo, Chicken Soup style).</a:t>
+              <a:rPr lang="en-US" b="1" dirty="0"/>
+              <a:t>KUWENTO </a:t>
+            </a:r>
+            <a:r>
+              <a:rPr lang="en-US" dirty="0"/>
+              <a:t>— Ang Alila ng mga Alipin (basahin nang buo, Chicken Soup style).</a:t>
             </a:r>
           </a:p>
           <a:p>
@@ -1530,10 +1391,13 @@
           </a:p>
           <a:p>
             <a:r>
-              <a:rPr lang="en-US" dirty="0"/>
-              <a:t>Sa guide, ipa-tap para guhitan ang dahilan kung bakit ginawa ni Jesus ang Kaniyang ginawa: binigyan ko kayo ng halimbawa upang inyong tularan (sa printed guide, guhitan ng pen).</a:t>
-            </a:r>
-            <a:endParaRPr lang="en-US" dirty="0"/>
+              <a:rPr lang="en-US" b="1" dirty="0"/>
+              <a:t>Ipaguhitan sa guide</a:t>
+            </a:r>
+            <a:r>
+              <a:rPr lang="en-US" dirty="0"/>
+              <a:t> ang dahilan kung bakit ginawa ni Jesus ang Kaniyang ginawa: binigyan ko kayo ng halimbawa upang inyong tularan.</a:t>
+            </a:r>
           </a:p>
         </p:txBody>
       </p:sp>
@@ -1636,22 +1500,37 @@
           </a:p>
           <a:p>
             <a:r>
-              <a:rPr lang="en-US" dirty="0"/>
+              <a:rPr lang="en-US" b="1" dirty="0"/>
               <a:t>Isulat muna, 2-3 sasagot.</a:t>
             </a:r>
           </a:p>
           <a:p>
             <a:r>
-              <a:rPr lang="en-US" dirty="0"/>
-              <a:t>I-celebrate ang mga pinangalanan — puwede silang pasalamatan ngayong linggo.</a:t>
-            </a:r>
-          </a:p>
-          <a:p>
-            <a:r>
-              <a:rPr lang="en-US" dirty="0"/>
-              <a:t>Pansinin kung gaano kadalas ang mga nahahalintulad ay mga taong tahimik at hindi napapansin.</a:t>
-            </a:r>
-            <a:endParaRPr lang="en-US" dirty="0"/>
+              <a:rPr lang="en-US" b="1" dirty="0"/>
+              <a:t>I-celebrate ang mga pinangalanan </a:t>
+            </a:r>
+            <a:r>
+              <a:rPr lang="en-US" dirty="0"/>
+              <a:t>— puwede silang pasalamatan ngayong </a:t>
+            </a:r>
+            <a:r>
+              <a:rPr lang="en-US" dirty="0" err="1"/>
+              <a:t>linggo</a:t>
+            </a:r>
+            <a:r>
+              <a:rPr lang="en-US" dirty="0"/>
+              <a:t>.</a:t>
+            </a:r>
+          </a:p>
+          <a:p>
+            <a:r>
+              <a:rPr lang="en-US" dirty="0" err="1"/>
+              <a:t>Pansinin</a:t>
+            </a:r>
+            <a:r>
+              <a:rPr lang="en-US" dirty="0"/>
+              <a:t> kung gaano kadalas ang mga nahahalintulad ay mga taong tahimik at hindi napapansin.</a:t>
+            </a:r>
           </a:p>
         </p:txBody>
       </p:sp>
@@ -1747,18 +1626,30 @@
             </a:r>
           </a:p>
           <a:p>
+            <a:pPr marL="228600" indent="-228600">
+              <a:buFont typeface="+mj-lt"/>
+              <a:buAutoNum type="arabicPeriod"/>
+            </a:pPr>
             <a:r>
               <a:rPr lang="en-US" dirty="0"/>
               <a:t>Una, may kagalakan: opportunity ang paglilingkod, kaya huwag kang busangot kapag nagmi-ministry (Ephesians 6:7).</a:t>
             </a:r>
           </a:p>
           <a:p>
+            <a:pPr marL="228600" indent="-228600">
+              <a:buFont typeface="+mj-lt"/>
+              <a:buAutoNum type="arabicPeriod"/>
+            </a:pPr>
             <a:r>
               <a:rPr lang="en-US" dirty="0"/>
               <a:t>Pangalawa, may pag-ibig: maglingkod ka dahil mahal mo ang Panginoon at ang iyong kapwa (Galatians 5:13).</a:t>
             </a:r>
           </a:p>
           <a:p>
+            <a:pPr marL="228600" indent="-228600">
+              <a:buFont typeface="+mj-lt"/>
+              <a:buAutoNum type="arabicPeriod"/>
+            </a:pPr>
             <a:r>
               <a:rPr lang="en-US" dirty="0"/>
               <a:t>Pangatlo, ayon sa kakayahang ibinigay ni Lord: tayong lahat ay bahagi ng Katawan ni Kristo, at may specific na assignment Siya ayon sa spiritual gifts at abilities na ipinagkaloob Niya (1 Corinthians 12:11).</a:t>
@@ -1773,9 +1664,16 @@
           <a:p>
             <a:r>
               <a:rPr lang="en-US" dirty="0"/>
-              <a:t>Tandaang hindi para sa iyo ang spiritual giftings mula kay Lord kundi para sa benefit ng iba (1 Peter 4:10) — iyan ang kabutihan: kabutihang nagiging kapaki-pakinabang sa iba.</a:t>
-            </a:r>
-            <a:endParaRPr lang="en-US" dirty="0"/>
+              <a:t>Tandaang </a:t>
+            </a:r>
+            <a:r>
+              <a:rPr lang="en-US" b="1" dirty="0"/>
+              <a:t>hindi para sa iyo ang spiritual giftings </a:t>
+            </a:r>
+            <a:r>
+              <a:rPr lang="en-US" dirty="0"/>
+              <a:t>mula kay Lord kundi para sa benefit ng iba (1 Peter 4:10) — iyan ang kabutihan: kabutihang nagiging kapaki-pakinabang sa iba.</a:t>
+            </a:r>
           </a:p>
         </p:txBody>
       </p:sp>
@@ -1867,27 +1765,60 @@
           <a:p>
             <a:r>
               <a:rPr lang="en-US" dirty="0"/>
-              <a:t>Sabi sa John 12:26: Ang naghahangad na maglingkod sa akin ay dapat sumunod sa akin, at saanman ako naroroon ay naroroon din siya. Pararangalan ng Ama ang sinumang naglilingkod sa akin.</a:t>
-            </a:r>
-          </a:p>
-          <a:p>
-            <a:r>
-              <a:rPr lang="en-US" dirty="0"/>
-              <a:t>Naghihintay sa isang tapat na lingkod ang pangako ng presensya at parangal ng Dios.</a:t>
-            </a:r>
-          </a:p>
-          <a:p>
-            <a:r>
-              <a:rPr lang="en-US" dirty="0"/>
-              <a:t>Wala nang mas hihigit pa sa ligaya na marinig mula sa Panginoon: Magaling! Tapat at mabuting lingkod!</a:t>
-            </a:r>
-          </a:p>
-          <a:p>
-            <a:r>
-              <a:rPr lang="en-US" dirty="0"/>
-              <a:t>Pansinin: mabuting lingkod — kabutihan ang hinahanap ng Master sa Kaniyang lingkod.</a:t>
-            </a:r>
-            <a:endParaRPr lang="en-US" dirty="0"/>
+              <a:t>Sabi sa John 12:26: Ang naghahangad na maglingkod sa akin ay dapat sumunod sa akin, at </a:t>
+            </a:r>
+            <a:r>
+              <a:rPr lang="en-US" b="1" dirty="0"/>
+              <a:t>saanman ako naroroon ay naroroon din siya</a:t>
+            </a:r>
+            <a:r>
+              <a:rPr lang="en-US" dirty="0"/>
+              <a:t>. </a:t>
+            </a:r>
+          </a:p>
+          <a:p>
+            <a:r>
+              <a:rPr lang="en-US" dirty="0" err="1"/>
+              <a:t>Pararangalan</a:t>
+            </a:r>
+            <a:r>
+              <a:rPr lang="en-US" dirty="0"/>
+              <a:t> ng Ama ang sinumang naglilingkod sa akin.</a:t>
+            </a:r>
+          </a:p>
+          <a:p>
+            <a:r>
+              <a:rPr lang="en-US" dirty="0"/>
+              <a:t>Naghihintay sa isang tapat na lingkod ang </a:t>
+            </a:r>
+            <a:r>
+              <a:rPr lang="en-US" b="1" dirty="0"/>
+              <a:t>pangako ng presensya at parangal ng Dios</a:t>
+            </a:r>
+            <a:r>
+              <a:rPr lang="en-US" dirty="0"/>
+              <a:t>.</a:t>
+            </a:r>
+          </a:p>
+          <a:p>
+            <a:r>
+              <a:rPr lang="en-US" dirty="0"/>
+              <a:t>Wala nang mas hihigit pa sa ligaya na marinig mula sa Panginoon: </a:t>
+            </a:r>
+            <a:r>
+              <a:rPr lang="en-US" b="1" dirty="0"/>
+              <a:t>Magaling! Tapat at mabuting lingkod!</a:t>
+            </a:r>
+          </a:p>
+          <a:p>
+            <a:r>
+              <a:rPr lang="en-US" dirty="0"/>
+              <a:t>Pansinin: mabuting lingkod — </a:t>
+            </a:r>
+            <a:r>
+              <a:rPr lang="en-US" b="1" dirty="0"/>
+              <a:t>kabutihan ang hinahanap ng Master sa Kaniyang lingkod.</a:t>
+            </a:r>
           </a:p>
         </p:txBody>
       </p:sp>
@@ -1979,19 +1910,25 @@
           <a:p>
             <a:r>
               <a:rPr lang="en-US" dirty="0"/>
-              <a:t>Basahin nang malakas nang dalawang beses — unang basa ikaw, pangalawa sabay-sabay.</a:t>
-            </a:r>
-          </a:p>
-          <a:p>
-            <a:r>
-              <a:rPr lang="en-US" dirty="0"/>
-              <a:t>Sa ikaapat na dahilan mamaya, ita-tap nila sa guide ang dalawang dahilan ni Jesus sa pagparito para bilugan: maglingkod, at mag-alay ng buhay (sa printed guide, bilugan ng pen).</a:t>
-            </a:r>
-          </a:p>
-          <a:p>
-            <a:r>
-              <a:rPr lang="en-US" dirty="0"/>
-              <a:t>Pansinin ang hindi Niya ginawa: hindi Siya naparito para paglingkuran.</a:t>
+              <a:t>Basahin nang malakas nang dalawang beses — unang basa ikaw, pangalawa </a:t>
+            </a:r>
+            <a:r>
+              <a:rPr lang="en-US" dirty="0" err="1"/>
+              <a:t>sabay-sabay</a:t>
+            </a:r>
+            <a:r>
+              <a:rPr lang="en-US" dirty="0"/>
+              <a:t>.</a:t>
+            </a:r>
+          </a:p>
+          <a:p>
+            <a:r>
+              <a:rPr lang="en-US" dirty="0" err="1"/>
+              <a:t>Pansinin</a:t>
+            </a:r>
+            <a:r>
+              <a:rPr lang="en-US" dirty="0"/>
+              <a:t> ang hindi Niya ginawa: hindi Siya naparito para paglingkuran.</a:t>
             </a:r>
           </a:p>
           <a:p>
@@ -2005,7 +1942,6 @@
               <a:rPr lang="en-US" dirty="0"/>
               <a:t>Huwag munang i-explain nang mahaba.</a:t>
             </a:r>
-            <a:endParaRPr lang="en-US" dirty="0"/>
           </a:p>
         </p:txBody>
       </p:sp>
@@ -2129,7 +2065,6 @@
               <a:rPr lang="en-US" dirty="0"/>
               <a:t>Ang character anchor, Kabutihan: ang mabuting lingkod ay ginagamit ang natanggap niya para sa kapakinabangan ng lahat.</a:t>
             </a:r>
-            <a:endParaRPr lang="en-US" dirty="0"/>
           </a:p>
         </p:txBody>
       </p:sp>
@@ -2241,7 +2176,6 @@
               <a:rPr lang="en-US" dirty="0"/>
               <a:t>Ang vulnerability ng lead ang nagbubukas ng pinto para sa iba.</a:t>
             </a:r>
-            <a:endParaRPr lang="en-US" dirty="0"/>
           </a:p>
         </p:txBody>
       </p:sp>
@@ -2359,7 +2293,6 @@
               <a:rPr lang="en-US" dirty="0"/>
               <a:t>Huwag i-fix — pangalanan muna.</a:t>
             </a:r>
-            <a:endParaRPr lang="en-US" dirty="0"/>
           </a:p>
         </p:txBody>
       </p:sp>
@@ -2477,7 +2410,6 @@
               <a:rPr lang="en-US" dirty="0"/>
               <a:t>At sa Katawan ni Kristo: may parteng hindi gumagalaw, kaya kulang ang buong katawan.</a:t>
             </a:r>
-            <a:endParaRPr lang="en-US" dirty="0"/>
           </a:p>
         </p:txBody>
       </p:sp>
@@ -2595,7 +2527,6 @@
               <a:rPr lang="en-US" dirty="0"/>
               <a:t>Isara ang TALAKAY sa isang pangungusap na panalangin ng isang miyembro ng bawat table.</a:t>
             </a:r>
-            <a:endParaRPr lang="en-US" dirty="0"/>
           </a:p>
         </p:txBody>
       </p:sp>
@@ -2686,8 +2617,12 @@
           </a:p>
           <a:p>
             <a:r>
-              <a:rPr lang="en-US" dirty="0"/>
-              <a:t>KUWENTO — Limang Binata sa Dalampasigan (basahin nang buo, Chicken Soup style).</a:t>
+              <a:rPr lang="en-US" b="1" dirty="0"/>
+              <a:t>KUWENTO</a:t>
+            </a:r>
+            <a:r>
+              <a:rPr lang="en-US" dirty="0"/>
+              <a:t> — Limang Binata sa Dalampasigan (basahin nang buo, Chicken Soup style).</a:t>
             </a:r>
           </a:p>
           <a:p>
@@ -2819,9 +2754,12 @@
           <a:p>
             <a:r>
               <a:rPr lang="en-US" dirty="0"/>
-              <a:t>Tulay sa Bondservant Path: hindi lahat ay tatawagin sa Ecuador — pero lahat ay tinawag na maging manggagawa.</a:t>
-            </a:r>
-            <a:endParaRPr lang="en-US" dirty="0"/>
+              <a:t>Tulay sa Bondservant Path: </a:t>
+            </a:r>
+            <a:r>
+              <a:rPr lang="en-US" b="1" dirty="0"/>
+              <a:t>hindi lahat ay tatawagin sa Ecuador — pero lahat ay tinawag na maging manggagawa.</a:t>
+            </a:r>
           </a:p>
         </p:txBody>
       </p:sp>
@@ -2951,7 +2889,6 @@
               <a:rPr lang="en-US" dirty="0"/>
               <a:t>Silent writing. GUARD THE SILENCE.</a:t>
             </a:r>
-            <a:endParaRPr lang="en-US" dirty="0"/>
           </a:p>
         </p:txBody>
       </p:sp>
@@ -3069,7 +3006,6 @@
               <a:rPr lang="en-US" dirty="0"/>
               <a:t>Pagkatapos, isang pangungusap sa katabi: Ang pinakamalaking insight ko ay...</a:t>
             </a:r>
-            <a:endParaRPr lang="en-US" dirty="0"/>
           </a:p>
         </p:txBody>
       </p:sp>
@@ -3172,14 +3108,36 @@
           </a:p>
           <a:p>
             <a:r>
-              <a:rPr lang="en-US" dirty="0"/>
-              <a:t>Pangalawa, sagutan ang Spiritual Gift Survey kasama ang iyong mga ka-small group.</a:t>
-            </a:r>
-          </a:p>
-          <a:p>
-            <a:r>
-              <a:rPr lang="en-US" dirty="0"/>
-              <a:t>Pangatlo, sagutan ang Spiritual Growth Assessment form sa Appendix B; kung handa ka nang mag-commit kay Lord na mag-ministry, fill-upan ang Ministry Covenant sa Appendix C.</a:t>
+              <a:rPr lang="en-US" i="1" dirty="0"/>
+              <a:t>|</a:t>
+            </a:r>
+            <a:r>
+              <a:rPr lang="en-US" i="1" dirty="0" err="1"/>
+              <a:t>Pangalawa</a:t>
+            </a:r>
+            <a:r>
+              <a:rPr lang="en-US" i="1" dirty="0"/>
+              <a:t>, sagutan ang Spiritual Gift Survey kasama ang iyong mga ka-small group.</a:t>
+            </a:r>
+          </a:p>
+          <a:p>
+            <a:r>
+              <a:rPr lang="en-US" i="1" dirty="0"/>
+              <a:t>|</a:t>
+            </a:r>
+            <a:r>
+              <a:rPr lang="en-US" i="1" dirty="0" err="1"/>
+              <a:t>Pangatlo</a:t>
+            </a:r>
+            <a:r>
+              <a:rPr lang="en-US" i="1" dirty="0"/>
+              <a:t>, sagutan ang Spiritual Growth Assessment form sa Appendix B; kung handa ka nang mag-commit kay Lord na mag-ministry, fill-upan ang Ministry Covenant sa Appendix C.</a:t>
+            </a:r>
+          </a:p>
+          <a:p>
+            <a:r>
+              <a:rPr lang="en-US" i="0" dirty="0"/>
+              <a:t>Use MULTIPLY Spiritual Gifts and Conflict Style instead, then ask your LCL to discuss your ministry fit.</a:t>
             </a:r>
           </a:p>
           <a:p>
@@ -3193,7 +3151,6 @@
               <a:rPr lang="en-US" dirty="0"/>
               <a:t>At ang 7-Day Reading sa guide: isang passage tungkol sa paglilingkod bawat araw, at isang linya ng insight.</a:t>
             </a:r>
-            <a:endParaRPr lang="en-US" dirty="0"/>
           </a:p>
         </p:txBody>
       </p:sp>
@@ -3291,7 +3248,27 @@
           <a:p>
             <a:r>
               <a:rPr lang="en-US" dirty="0"/>
-              <a:t>Isulat muna sa guide, tapos bigkasin sa katabi.</a:t>
+              <a:t>Isulat muna sa guide, tapos bigkasin </a:t>
+            </a:r>
+            <a:r>
+              <a:rPr lang="en-US" dirty="0" err="1"/>
+              <a:t>sa</a:t>
+            </a:r>
+            <a:r>
+              <a:rPr lang="en-US" dirty="0"/>
+              <a:t> </a:t>
+            </a:r>
+            <a:r>
+              <a:rPr lang="en-US" dirty="0" err="1"/>
+              <a:t>katabi</a:t>
+            </a:r>
+            <a:r>
+              <a:rPr lang="en-US" dirty="0"/>
+              <a:t>, </a:t>
+            </a:r>
+            <a:r>
+              <a:rPr lang="en-US" b="1" dirty="0"/>
+              <a:t>one person first and then another.</a:t>
             </a:r>
           </a:p>
           <a:p>
@@ -3308,10 +3285,88 @@
           </a:p>
           <a:p>
             <a:r>
-              <a:rPr lang="en-US" dirty="0"/>
+              <a:rPr lang="en-US" b="1" dirty="0"/>
               <a:t>Ito ang pangakong babalikan ng discipler mo at ng L11.</a:t>
             </a:r>
-            <a:endParaRPr lang="en-US" dirty="0"/>
+          </a:p>
+          <a:p>
+            <a:r>
+              <a:rPr lang="en-US" b="0" dirty="0"/>
+              <a:t>NOTE: You will notice at the end of your guide that there is </a:t>
+            </a:r>
+            <a:r>
+              <a:rPr lang="en-US" b="1" dirty="0"/>
+              <a:t>Para </a:t>
+            </a:r>
+            <a:r>
+              <a:rPr lang="en-US" b="1" dirty="0" err="1"/>
+              <a:t>sa</a:t>
+            </a:r>
+            <a:r>
+              <a:rPr lang="en-US" b="1" dirty="0"/>
+              <a:t> </a:t>
+            </a:r>
+            <a:r>
+              <a:rPr lang="en-US" b="1" dirty="0" err="1"/>
+              <a:t>Gustong</a:t>
+            </a:r>
+            <a:r>
+              <a:rPr lang="en-US" b="1" dirty="0"/>
+              <a:t> </a:t>
+            </a:r>
+            <a:r>
+              <a:rPr lang="en-US" b="1" dirty="0" err="1"/>
+              <a:t>Lumalim</a:t>
+            </a:r>
+            <a:r>
+              <a:rPr lang="en-US" b="1" dirty="0"/>
+              <a:t> Pa.</a:t>
+            </a:r>
+          </a:p>
+          <a:p>
+            <a:r>
+              <a:rPr lang="en-US" b="0" dirty="0"/>
+              <a:t>It’s optional kaya para lang </a:t>
+            </a:r>
+            <a:r>
+              <a:rPr lang="en-US" b="0" dirty="0" err="1"/>
+              <a:t>sa</a:t>
+            </a:r>
+            <a:r>
+              <a:rPr lang="en-US" b="0" dirty="0"/>
+              <a:t> gusto.</a:t>
+            </a:r>
+          </a:p>
+          <a:p>
+            <a:r>
+              <a:rPr lang="en-US" b="0" dirty="0"/>
+              <a:t>Sino </a:t>
+            </a:r>
+            <a:r>
+              <a:rPr lang="en-US" b="0" dirty="0" err="1"/>
+              <a:t>yun</a:t>
+            </a:r>
+            <a:r>
+              <a:rPr lang="en-US" b="0" dirty="0"/>
+              <a:t>?</a:t>
+            </a:r>
+          </a:p>
+          <a:p>
+            <a:r>
+              <a:rPr lang="en-US" b="0" dirty="0"/>
+              <a:t>It’s between you and the Lord.</a:t>
+            </a:r>
+          </a:p>
+          <a:p>
+            <a:r>
+              <a:rPr lang="en-US" b="0" dirty="0"/>
+              <a:t>It’s how you </a:t>
+            </a:r>
+            <a:r>
+              <a:rPr lang="en-US" b="0"/>
+              <a:t>understood this lesson.</a:t>
+            </a:r>
+            <a:endParaRPr lang="en-US" b="0" dirty="0"/>
           </a:p>
         </p:txBody>
       </p:sp>
@@ -3407,27 +3462,87 @@
             </a:r>
           </a:p>
           <a:p>
-            <a:r>
-              <a:rPr lang="en-US" dirty="0"/>
-              <a:t>Una, ang EOLO Bridge: ang isang pangalang hindi mo lang i-share-an ng Gospel, kundi commit kang hindi iiwan.</a:t>
-            </a:r>
-          </a:p>
-          <a:p>
-            <a:r>
-              <a:rPr lang="en-US" dirty="0"/>
-              <a:t>Pangalawa, ang 7-Araw na Bantay-Puso: isang maliit na hakbang ng paghayo o pagkalinga bawat araw.</a:t>
-            </a:r>
-          </a:p>
-          <a:p>
-            <a:r>
-              <a:rPr lang="en-US" dirty="0"/>
-              <a:t>Pangatlo, ang Romans 6:23 drawing para sa isang tao.</a:t>
-            </a:r>
-          </a:p>
-          <a:p>
-            <a:r>
-              <a:rPr lang="en-US" dirty="0"/>
-              <a:t>Basahin nang malakas ang Pangako Ko ng L9: Hindi ako magiging S.S.S. Christian. Hahayo ako — saksi at sugo. At ang isisilang ko sa pananampalataya, hindi ko iiwan hanggang siya'y lumago.</a:t>
+            <a:pPr marL="228600" indent="-228600">
+              <a:buFont typeface="+mj-lt"/>
+              <a:buAutoNum type="arabicPeriod"/>
+            </a:pPr>
+            <a:r>
+              <a:rPr lang="en-US" dirty="0"/>
+              <a:t>Una, ang EOLO Bridge: </a:t>
+            </a:r>
+            <a:r>
+              <a:rPr lang="en-US" b="1" dirty="0"/>
+              <a:t>ang isang pangalang hindi mo lang i-share-an ng Gospel, kundi commit kang hindi </a:t>
+            </a:r>
+            <a:r>
+              <a:rPr lang="en-US" b="1" dirty="0" err="1"/>
+              <a:t>iiwan</a:t>
+            </a:r>
+            <a:r>
+              <a:rPr lang="en-US" b="1" dirty="0"/>
+              <a:t>.</a:t>
+            </a:r>
+          </a:p>
+          <a:p>
+            <a:pPr marL="228600" indent="-228600">
+              <a:buFont typeface="+mj-lt"/>
+              <a:buAutoNum type="arabicPeriod"/>
+            </a:pPr>
+            <a:r>
+              <a:rPr lang="en-US" dirty="0" err="1"/>
+              <a:t>Pangalawa</a:t>
+            </a:r>
+            <a:r>
+              <a:rPr lang="en-US" dirty="0"/>
+              <a:t>, ang 7-Araw na Bantay-Puso: </a:t>
+            </a:r>
+            <a:r>
+              <a:rPr lang="en-US" b="1" dirty="0"/>
+              <a:t>isang maliit na hakbang ng paghayo o pagkalinga bawat </a:t>
+            </a:r>
+            <a:r>
+              <a:rPr lang="en-US" b="1" dirty="0" err="1"/>
+              <a:t>araw</a:t>
+            </a:r>
+            <a:r>
+              <a:rPr lang="en-US" b="1" dirty="0"/>
+              <a:t>.</a:t>
+            </a:r>
+          </a:p>
+          <a:p>
+            <a:pPr marL="228600" indent="-228600">
+              <a:buFont typeface="+mj-lt"/>
+              <a:buAutoNum type="arabicPeriod"/>
+            </a:pPr>
+            <a:r>
+              <a:rPr lang="en-US" dirty="0" err="1"/>
+              <a:t>Pangatlo</a:t>
+            </a:r>
+            <a:r>
+              <a:rPr lang="en-US" dirty="0"/>
+              <a:t>, ang Romans 6:23 drawing para sa isang </a:t>
+            </a:r>
+            <a:r>
+              <a:rPr lang="en-US" dirty="0" err="1"/>
+              <a:t>tao</a:t>
+            </a:r>
+            <a:r>
+              <a:rPr lang="en-US" dirty="0"/>
+              <a:t>.</a:t>
+            </a:r>
+          </a:p>
+          <a:p>
+            <a:r>
+              <a:rPr lang="en-US" dirty="0" err="1"/>
+              <a:t>Basahin</a:t>
+            </a:r>
+            <a:r>
+              <a:rPr lang="en-US" dirty="0"/>
+              <a:t> nang malakas ang Pangako Ko ng L9: </a:t>
+            </a:r>
+            <a:r>
+              <a:rPr lang="en-US" b="1" dirty="0"/>
+              <a:t>Hindi ako magiging S.S.S. Christian. Hahayo ako — saksi at sugo. At ang isisilang ko sa pananampalataya, hindi ko iiwan hanggang siya'y lumago.</a:t>
             </a:r>
           </a:p>
           <a:p>
@@ -3441,7 +3556,6 @@
               <a:rPr lang="en-US" dirty="0"/>
               <a:t>Tulay: noong L9, hinayo natin ang iba; ngayong gabi, tatanungin natin kung paano tayo maglilingkod sa Kaniyang katawan.</a:t>
             </a:r>
-            <a:endParaRPr lang="en-US" dirty="0"/>
           </a:p>
         </p:txBody>
       </p:sp>
@@ -3565,7 +3679,6 @@
               <a:rPr lang="en-US" dirty="0"/>
               <a:t>Tapos ang 60 minuto — landing sa 01:00.</a:t>
             </a:r>
-            <a:endParaRPr lang="en-US" dirty="0"/>
           </a:p>
         </p:txBody>
       </p:sp>
@@ -3695,7 +3808,6 @@
               <a:rPr lang="en-US" dirty="0"/>
               <a:t>Itala ng interns kung sino ang walang dala — para sa gentle catch-up, hindi pagsabihan.</a:t>
             </a:r>
-            <a:endParaRPr lang="en-US" dirty="0"/>
           </a:p>
         </p:txBody>
       </p:sp>
@@ -3827,12 +3939,20 @@
             </a:r>
           </a:p>
           <a:p>
+            <a:pPr marL="228600" indent="-228600">
+              <a:buFont typeface="+mj-lt"/>
+              <a:buAutoNum type="arabicPeriod"/>
+            </a:pPr>
             <a:r>
               <a:rPr lang="en-US" dirty="0"/>
               <a:t>Una, ang pagtindig niya para kay Kristo.</a:t>
             </a:r>
           </a:p>
           <a:p>
+            <a:pPr marL="228600" indent="-228600">
+              <a:buFont typeface="+mj-lt"/>
+              <a:buAutoNum type="arabicPeriod"/>
+            </a:pPr>
             <a:r>
               <a:rPr lang="en-US" dirty="0"/>
               <a:t>Pangalawa, ang hindi niya pagyuko kay Caesar.</a:t>
@@ -3845,6 +3965,10 @@
             </a:r>
           </a:p>
           <a:p>
+            <a:pPr marL="171450" indent="-171450">
+              <a:buFont typeface="Arial" panose="020B0604020202020204" pitchFamily="34" charset="0"/>
+              <a:buChar char="•"/>
+            </a:pPr>
             <a:r>
               <a:rPr lang="en-US" dirty="0"/>
               <a:t>"Maawa ka sa sarili mo! Sumpain mo si Kristo at palalayain kita!"</a:t>
@@ -3863,12 +3987,20 @@
             </a:r>
           </a:p>
           <a:p>
+            <a:pPr marL="171450" indent="-171450">
+              <a:buFont typeface="Arial" panose="020B0604020202020204" pitchFamily="34" charset="0"/>
+              <a:buChar char="•"/>
+            </a:pPr>
             <a:r>
               <a:rPr lang="en-US" dirty="0"/>
               <a:t>"Walumpu't anim na taon kong pinaglingkuran si Kristo, at wala Siyang ginawang kahit anong kamalian sa akin."</a:t>
             </a:r>
           </a:p>
           <a:p>
+            <a:pPr marL="171450" indent="-171450">
+              <a:buFont typeface="Arial" panose="020B0604020202020204" pitchFamily="34" charset="0"/>
+              <a:buChar char="•"/>
+            </a:pPr>
             <a:r>
               <a:rPr lang="en-US" dirty="0"/>
               <a:t>"Paano ko lalapastanganin ang aking Hari at Tagapagligtas?"</a:t>
@@ -3900,7 +4032,7 @@
           </a:p>
           <a:p>
             <a:r>
-              <a:rPr lang="en-US" dirty="0"/>
+              <a:rPr lang="en-US" b="1" dirty="0"/>
               <a:t>Ang unang Kristyanong martir ng ikalawang siglo.</a:t>
             </a:r>
           </a:p>
@@ -3921,7 +4053,6 @@
               <a:rPr lang="en-US" dirty="0"/>
               <a:t>Huwag pang ipaliwanag ang aral — hayaang tumama ang kuwento.</a:t>
             </a:r>
-            <a:endParaRPr lang="en-US" dirty="0"/>
           </a:p>
         </p:txBody>
       </p:sp>
@@ -4024,7 +4155,7 @@
           </a:p>
           <a:p>
             <a:r>
-              <a:rPr lang="en-US" dirty="0"/>
+              <a:rPr lang="en-US" b="1" dirty="0"/>
               <a:t>Silent writing muna, tapos 1-2 sasagot lang.</a:t>
             </a:r>
           </a:p>
@@ -4045,7 +4176,6 @@
               <a:rPr lang="en-US" dirty="0"/>
               <a:t>Huwag sagutin; hayaan munang nakabitin ang tanong.</a:t>
             </a:r>
-            <a:endParaRPr lang="en-US" dirty="0"/>
           </a:p>
         </p:txBody>
       </p:sp>
@@ -4147,12 +4277,24 @@
             </a:r>
           </a:p>
           <a:p>
+            <a:pPr marL="171450" indent="-171450">
+              <a:buFont typeface="Arial" panose="020B0604020202020204" pitchFamily="34" charset="0"/>
+              <a:buChar char="•"/>
+            </a:pPr>
             <a:r>
               <a:rPr lang="en-US" dirty="0"/>
               <a:t>Honestly, hindi natural para sa atin ang maglingkod sa Dios at kapwa dahil makasarili tayo — mas gusto nating tayo ang pinaglilingkuran.</a:t>
             </a:r>
           </a:p>
           <a:p>
+            <a:pPr marL="0" indent="0">
+              <a:buFont typeface="Arial" panose="020B0604020202020204" pitchFamily="34" charset="0"/>
+              <a:buNone/>
+            </a:pPr>
+            <a:r>
+              <a:rPr lang="en-US" b="1" dirty="0"/>
+              <a:t>Agree or disagree?: </a:t>
+            </a:r>
             <a:r>
               <a:rPr lang="en-US" dirty="0"/>
               <a:t>Allergic tayong maging SERVANT; ang gusto natin, maging SIR o boss.</a:t>
@@ -4172,10 +4314,13 @@
           </a:p>
           <a:p>
             <a:r>
-              <a:rPr lang="en-US" dirty="0"/>
-              <a:t>Sabihin sa participants: may mga patlang sa guide ninyo — punan habang nakikinig.</a:t>
-            </a:r>
-            <a:endParaRPr lang="en-US" dirty="0"/>
+              <a:rPr lang="en-US" b="1" dirty="0"/>
+              <a:t>Sabihin sa participants: </a:t>
+            </a:r>
+            <a:r>
+              <a:rPr lang="en-US" dirty="0"/>
+              <a:t>may mga patlang sa guide ninyo — punan habang nakikinig.</a:t>
+            </a:r>
           </a:p>
         </p:txBody>
       </p:sp>
@@ -4267,7 +4412,25 @@
           <a:p>
             <a:r>
               <a:rPr lang="en-US" dirty="0"/>
-              <a:t>Sabi ni Jesus sa Luke 17:10: kapag nagawa na ninyo ang lahat ng iniuutos sa inyo, sabihin ninyo, Kami'y mga aliping walang kabuluhan; tumutupad lamang kami sa aming tungkulin.</a:t>
+              <a:t>Sabi ni Jesus sa Luke 17:10: kapag nagawa na ninyo ang lahat ng iniuutos sa inyo, sabihin ninyo, Kami'y mga aliping walang kabuluhan; tumutupad lamang kami sa aming </a:t>
+            </a:r>
+            <a:r>
+              <a:rPr lang="en-US" dirty="0" err="1"/>
+              <a:t>tungkulin</a:t>
+            </a:r>
+            <a:r>
+              <a:rPr lang="en-US" dirty="0"/>
+              <a:t>.</a:t>
+            </a:r>
+          </a:p>
+          <a:p>
+            <a:pPr marL="171450" indent="-171450">
+              <a:buFont typeface="Arial" panose="020B0604020202020204" pitchFamily="34" charset="0"/>
+              <a:buChar char="•"/>
+            </a:pPr>
+            <a:r>
+              <a:rPr lang="en-US" dirty="0"/>
+              <a:t>A servant only does what he is told and doesn’t expect anything more.</a:t>
             </a:r>
           </a:p>
           <a:p>
@@ -4278,22 +4441,54 @@
           </a:p>
           <a:p>
             <a:r>
-              <a:rPr lang="en-US" dirty="0"/>
+              <a:rPr lang="en-US" b="1" dirty="0"/>
               <a:t>Ito ang DNA ng term na MINISTRY.</a:t>
             </a:r>
           </a:p>
           <a:p>
             <a:r>
               <a:rPr lang="en-US" dirty="0"/>
-              <a:t>Hango ang salitang ministry sa Greek words na diakoneo, maglingkod, at douleuo, magsilbi bilang alipin.</a:t>
-            </a:r>
-          </a:p>
-          <a:p>
-            <a:r>
-              <a:rPr lang="en-US" dirty="0"/>
-              <a:t>At tulad ni Polycarp, dalawa lang ang option mo — tumalikod o maglingkod. Walang middle ground.</a:t>
+              <a:t>Hango ang salitang ministry sa Greek words na diakoneo, maglingkod, at douleuo, magsilbi bilang </a:t>
+            </a:r>
+            <a:r>
+              <a:rPr lang="en-US" dirty="0" err="1"/>
+              <a:t>alipin</a:t>
+            </a:r>
+            <a:r>
+              <a:rPr lang="en-US" dirty="0"/>
+              <a:t>.</a:t>
+            </a:r>
+          </a:p>
+          <a:p>
+            <a:pPr marL="171450" lvl="0" indent="-171450">
+              <a:buFont typeface="Arial" panose="020B0604020202020204" pitchFamily="34" charset="0"/>
+              <a:buChar char="•"/>
+            </a:pPr>
+            <a:r>
+              <a:rPr lang="en-PH" dirty="0"/>
+              <a:t>Diakonos describes someone who serves.</a:t>
+            </a:r>
+          </a:p>
+          <a:p>
+            <a:pPr marL="171450" lvl="0" indent="-171450">
+              <a:buFont typeface="Arial" panose="020B0604020202020204" pitchFamily="34" charset="0"/>
+              <a:buChar char="•"/>
+            </a:pPr>
+            <a:r>
+              <a:rPr lang="en-PH" dirty="0"/>
+              <a:t>Doulos describes someone whose life belongs to a master.</a:t>
             </a:r>
             <a:endParaRPr lang="en-US" dirty="0"/>
+          </a:p>
+          <a:p>
+            <a:r>
+              <a:rPr lang="en-US" b="1" dirty="0"/>
+              <a:t>At tulad ni Polycarp, dalawa lang ang option mo </a:t>
+            </a:r>
+            <a:r>
+              <a:rPr lang="en-US" dirty="0"/>
+              <a:t>— tumalikod o maglingkod. Walang middle ground.</a:t>
+            </a:r>
           </a:p>
         </p:txBody>
       </p:sp>
@@ -4384,8 +4579,12 @@
           </a:p>
           <a:p>
             <a:r>
-              <a:rPr lang="en-US" dirty="0"/>
-              <a:t>Sa guide, ipa-tap ang mga salita: ang tamad para malagyan ng ekis, ang magpakasipag at maglingkod para ma-check (sa printed guide, gamitin ang pen).</a:t>
+              <a:rPr lang="en-US" b="1" dirty="0"/>
+              <a:t>Ipalagay sa guide: </a:t>
+            </a:r>
+            <a:r>
+              <a:rPr lang="en-US" dirty="0"/>
+              <a:t>ekis sa salitang tamad, check sa magpakasipag at maglingkod.</a:t>
             </a:r>
           </a:p>
           <a:p>
@@ -4403,7 +4602,57 @@
           <a:p>
             <a:r>
               <a:rPr lang="en-US" dirty="0"/>
-              <a:t>In other words, dapat gigil na gigil, atat na atat, at hot na hot tayong maglingkod — at hindi papatay-patay o papetiks-petiks sa gawain!</a:t>
+              <a:t>In other words, dapat gigil na gigil, atat na atat, at hot na hot tayong maglingkod — at hindi papatay-patay o papetiks-petiks sa </a:t>
+            </a:r>
+            <a:r>
+              <a:rPr lang="en-US" dirty="0" err="1"/>
+              <a:t>gawain</a:t>
+            </a:r>
+            <a:r>
+              <a:rPr lang="en-US" dirty="0"/>
+              <a:t>!</a:t>
+            </a:r>
+          </a:p>
+          <a:p>
+            <a:pPr marL="171450" indent="-171450">
+              <a:buFont typeface="Arial" panose="020B0604020202020204" pitchFamily="34" charset="0"/>
+              <a:buChar char="•"/>
+            </a:pPr>
+            <a:r>
+              <a:rPr lang="en-US" dirty="0"/>
+              <a:t>Ano pa ang </a:t>
+            </a:r>
+            <a:r>
+              <a:rPr lang="en-US" dirty="0" err="1"/>
+              <a:t>ibang</a:t>
+            </a:r>
+            <a:r>
+              <a:rPr lang="en-US" dirty="0"/>
+              <a:t> words </a:t>
+            </a:r>
+            <a:r>
+              <a:rPr lang="en-US" dirty="0" err="1"/>
+              <a:t>na</a:t>
+            </a:r>
+            <a:r>
+              <a:rPr lang="en-US" dirty="0"/>
+              <a:t> </a:t>
+            </a:r>
+            <a:r>
+              <a:rPr lang="en-US" dirty="0" err="1"/>
+              <a:t>pwedeng</a:t>
+            </a:r>
+            <a:r>
+              <a:rPr lang="en-US" dirty="0"/>
+              <a:t> </a:t>
+            </a:r>
+            <a:r>
+              <a:rPr lang="en-US" dirty="0" err="1"/>
+              <a:t>gamitin</a:t>
+            </a:r>
+            <a:r>
+              <a:rPr lang="en-US" dirty="0"/>
+              <a:t> – positive at negative</a:t>
             </a:r>
           </a:p>
           <a:p>
@@ -4417,7 +4666,6 @@
               <a:rPr lang="en-US" dirty="0"/>
               <a:t>Ang isang mananampalatayang umuusad ay isang mananampalatayang naglilingkod.</a:t>
             </a:r>
-            <a:endParaRPr lang="en-US" dirty="0"/>
           </a:p>
         </p:txBody>
       </p:sp>
@@ -4490,6 +4738,11 @@
 <file path=ppt/slideMasters/slideMaster1.xml><?xml version="1.0" encoding="utf-8"?>
 <p:sldMaster xmlns:a="http://schemas.openxmlformats.org/drawingml/2006/main" xmlns:r="http://schemas.openxmlformats.org/officeDocument/2006/relationships" xmlns:p="http://schemas.openxmlformats.org/presentationml/2006/main">
   <p:cSld>
+    <p:bg>
+      <p:bgRef idx="1001">
+        <a:schemeClr val="bg1"/>
+      </p:bgRef>
+    </p:bg>
     <p:spTree>
       <p:nvGrpSpPr>
         <p:cNvPr id="1" name=""/>
@@ -4800,6 +5053,13 @@
           </a:solidFill>
           <a:ln/>
         </p:spPr>
+        <p:txBody>
+          <a:bodyPr/>
+          <a:lstStyle/>
+          <a:p>
+            <a:endParaRPr lang="en-PH"/>
+          </a:p>
+        </p:txBody>
       </p:sp>
       <p:sp>
         <p:nvSpPr>
@@ -4822,11 +5082,11 @@
           <a:bodyPr wrap="square" lIns="0" tIns="0" rIns="0" bIns="0" rtlCol="0" anchor="ctr"/>
           <a:lstStyle/>
           <a:p>
-            <a:pPr algn="ctr" indent="0" marL="0">
-              <a:buNone/>
-            </a:pPr>
-            <a:r>
-              <a:rPr lang="en-US" sz="1600" b="1" spc="200" kern="0" dirty="0">
+            <a:pPr marL="0" indent="0" algn="ctr">
+              <a:buNone/>
+            </a:pPr>
+            <a:r>
+              <a:rPr lang="en-US" sz="1600" b="1" kern="0" spc="200" dirty="0">
                 <a:solidFill>
                   <a:srgbClr val="D4A854"/>
                 </a:solidFill>
@@ -4863,7 +5123,7 @@
           </a:bodyPr>
           <a:lstStyle/>
           <a:p>
-            <a:pPr algn="ctr" indent="0" marL="0">
+            <a:pPr marL="0" indent="0" algn="ctr">
               <a:buNone/>
             </a:pPr>
             <a:r>
@@ -4902,7 +5162,7 @@
           <a:bodyPr wrap="square" lIns="0" tIns="0" rIns="0" bIns="0" rtlCol="0" anchor="ctr"/>
           <a:lstStyle/>
           <a:p>
-            <a:pPr algn="ctr" indent="0" marL="0">
+            <a:pPr marL="0" indent="0" algn="ctr">
               <a:buNone/>
             </a:pPr>
             <a:r>
@@ -4941,7 +5201,7 @@
           <a:bodyPr wrap="square" lIns="0" tIns="0" rIns="0" bIns="0" rtlCol="0" anchor="ctr"/>
           <a:lstStyle/>
           <a:p>
-            <a:pPr algn="ctr" indent="0" marL="0">
+            <a:pPr marL="0" indent="0" algn="ctr">
               <a:buNone/>
             </a:pPr>
             <a:r>
@@ -4980,7 +5240,7 @@
           <a:bodyPr wrap="square" lIns="0" tIns="0" rIns="0" bIns="0" rtlCol="0" anchor="ctr"/>
           <a:lstStyle/>
           <a:p>
-            <a:pPr algn="ctr" indent="0" marL="0">
+            <a:pPr marL="0" indent="0" algn="ctr">
               <a:buNone/>
             </a:pPr>
             <a:r>
@@ -5019,6 +5279,13 @@
           </a:solidFill>
           <a:ln/>
         </p:spPr>
+        <p:txBody>
+          <a:bodyPr/>
+          <a:lstStyle/>
+          <a:p>
+            <a:endParaRPr lang="en-PH"/>
+          </a:p>
+        </p:txBody>
       </p:sp>
       <p:sp>
         <p:nvSpPr>
@@ -5041,7 +5308,7 @@
           <a:bodyPr wrap="square" lIns="0" tIns="0" rIns="0" bIns="0" rtlCol="0" anchor="ctr"/>
           <a:lstStyle/>
           <a:p>
-            <a:pPr algn="ctr" indent="0" marL="0">
+            <a:pPr marL="0" indent="0" algn="ctr">
               <a:buNone/>
             </a:pPr>
             <a:r>
@@ -5080,7 +5347,7 @@
           <a:bodyPr wrap="square" lIns="0" tIns="0" rIns="0" bIns="0" rtlCol="0" anchor="ctr"/>
           <a:lstStyle/>
           <a:p>
-            <a:pPr algn="r" indent="0" marL="0">
+            <a:pPr marL="0" indent="0" algn="r">
               <a:buNone/>
             </a:pPr>
             <a:r>
@@ -5142,6 +5409,13 @@
           </a:solidFill>
           <a:ln/>
         </p:spPr>
+        <p:txBody>
+          <a:bodyPr/>
+          <a:lstStyle/>
+          <a:p>
+            <a:endParaRPr lang="en-PH"/>
+          </a:p>
+        </p:txBody>
       </p:sp>
       <p:sp>
         <p:nvSpPr>
@@ -5166,6 +5440,13 @@
             <a:prstDash val="solid"/>
           </a:ln>
         </p:spPr>
+        <p:txBody>
+          <a:bodyPr/>
+          <a:lstStyle/>
+          <a:p>
+            <a:endParaRPr lang="en-PH"/>
+          </a:p>
+        </p:txBody>
       </p:sp>
       <p:sp>
         <p:nvSpPr>
@@ -5188,7 +5469,7 @@
           <a:bodyPr wrap="square" lIns="0" tIns="0" rIns="0" bIns="0" rtlCol="0" anchor="ctr"/>
           <a:lstStyle/>
           <a:p>
-            <a:pPr algn="ctr" indent="0" marL="0">
+            <a:pPr marL="0" indent="0" algn="ctr">
               <a:buNone/>
             </a:pPr>
             <a:r>
@@ -5229,7 +5510,7 @@
           </a:bodyPr>
           <a:lstStyle/>
           <a:p>
-            <a:pPr algn="l" indent="0" marL="0">
+            <a:pPr marL="0" indent="0" algn="l">
               <a:lnSpc>
                 <a:spcPct val="108000"/>
               </a:lnSpc>
@@ -5269,11 +5550,11 @@
         </p:spPr>
         <p:txBody>
           <a:bodyPr wrap="square" lIns="0" tIns="0" rIns="0" bIns="0" rtlCol="0" anchor="t">
-            <a:normAutofit/>
+            <a:normAutofit lnSpcReduction="10000"/>
           </a:bodyPr>
           <a:lstStyle/>
           <a:p>
-            <a:pPr algn="l" indent="0" marL="0">
+            <a:pPr marL="0" indent="0" algn="l">
               <a:lnSpc>
                 <a:spcPct val="108000"/>
               </a:lnSpc>
@@ -5313,11 +5594,11 @@
         </p:spPr>
         <p:txBody>
           <a:bodyPr wrap="square" lIns="0" tIns="0" rIns="0" bIns="0" rtlCol="0" anchor="t">
-            <a:normAutofit/>
+            <a:normAutofit lnSpcReduction="10000"/>
           </a:bodyPr>
           <a:lstStyle/>
           <a:p>
-            <a:pPr algn="l" indent="0" marL="0">
+            <a:pPr marL="0" indent="0" algn="l">
               <a:lnSpc>
                 <a:spcPct val="108000"/>
               </a:lnSpc>
@@ -5357,11 +5638,11 @@
         </p:spPr>
         <p:txBody>
           <a:bodyPr wrap="square" lIns="0" tIns="0" rIns="0" bIns="0" rtlCol="0" anchor="t">
-            <a:normAutofit/>
+            <a:normAutofit lnSpcReduction="10000"/>
           </a:bodyPr>
           <a:lstStyle/>
           <a:p>
-            <a:pPr algn="l" indent="0" marL="0">
+            <a:pPr marL="0" indent="0" algn="l">
               <a:lnSpc>
                 <a:spcPct val="108000"/>
               </a:lnSpc>
@@ -5401,11 +5682,11 @@
         </p:spPr>
         <p:txBody>
           <a:bodyPr wrap="square" lIns="0" tIns="0" rIns="0" bIns="0" rtlCol="0" anchor="t">
-            <a:normAutofit/>
+            <a:normAutofit lnSpcReduction="10000"/>
           </a:bodyPr>
           <a:lstStyle/>
           <a:p>
-            <a:pPr algn="l" indent="0" marL="0">
+            <a:pPr marL="0" indent="0" algn="l">
               <a:lnSpc>
                 <a:spcPct val="108000"/>
               </a:lnSpc>
@@ -5447,6 +5728,13 @@
           </a:solidFill>
           <a:ln/>
         </p:spPr>
+        <p:txBody>
+          <a:bodyPr/>
+          <a:lstStyle/>
+          <a:p>
+            <a:endParaRPr lang="en-PH"/>
+          </a:p>
+        </p:txBody>
       </p:sp>
       <p:sp>
         <p:nvSpPr>
@@ -5469,7 +5757,7 @@
           <a:bodyPr wrap="square" lIns="0" tIns="0" rIns="0" bIns="0" rtlCol="0" anchor="ctr"/>
           <a:lstStyle/>
           <a:p>
-            <a:pPr algn="ctr" indent="0" marL="0">
+            <a:pPr marL="0" indent="0" algn="ctr">
               <a:buNone/>
             </a:pPr>
             <a:r>
@@ -5508,7 +5796,7 @@
           <a:bodyPr wrap="square" lIns="0" tIns="0" rIns="0" bIns="0" rtlCol="0" anchor="ctr"/>
           <a:lstStyle/>
           <a:p>
-            <a:pPr algn="r" indent="0" marL="0">
+            <a:pPr marL="0" indent="0" algn="r">
               <a:buNone/>
             </a:pPr>
             <a:r>
@@ -5570,6 +5858,13 @@
           </a:solidFill>
           <a:ln/>
         </p:spPr>
+        <p:txBody>
+          <a:bodyPr/>
+          <a:lstStyle/>
+          <a:p>
+            <a:endParaRPr lang="en-PH"/>
+          </a:p>
+        </p:txBody>
       </p:sp>
       <p:sp>
         <p:nvSpPr>
@@ -5592,7 +5887,7 @@
           <a:bodyPr wrap="square" lIns="0" tIns="0" rIns="0" bIns="0" rtlCol="0" anchor="ctr"/>
           <a:lstStyle/>
           <a:p>
-            <a:pPr indent="0" marL="0">
+            <a:pPr marL="0" indent="0">
               <a:buNone/>
             </a:pPr>
             <a:r>
@@ -5631,7 +5926,7 @@
           <a:bodyPr wrap="square" lIns="0" tIns="0" rIns="0" bIns="0" rtlCol="0" anchor="ctr"/>
           <a:lstStyle/>
           <a:p>
-            <a:pPr indent="0" marL="0">
+            <a:pPr marL="0" indent="0">
               <a:buNone/>
             </a:pPr>
             <a:r>
@@ -5670,6 +5965,13 @@
           </a:solidFill>
           <a:ln/>
         </p:spPr>
+        <p:txBody>
+          <a:bodyPr/>
+          <a:lstStyle/>
+          <a:p>
+            <a:endParaRPr lang="en-PH"/>
+          </a:p>
+        </p:txBody>
       </p:sp>
       <p:sp>
         <p:nvSpPr>
@@ -5692,7 +5994,7 @@
           <a:bodyPr wrap="square" lIns="0" tIns="0" rIns="0" bIns="0" rtlCol="0" anchor="ctr"/>
           <a:lstStyle/>
           <a:p>
-            <a:pPr algn="ctr" indent="0" marL="0">
+            <a:pPr marL="0" indent="0" algn="ctr">
               <a:buNone/>
             </a:pPr>
             <a:r>
@@ -5731,7 +6033,7 @@
           <a:bodyPr wrap="square" lIns="0" tIns="0" rIns="0" bIns="0" rtlCol="0" anchor="t"/>
           <a:lstStyle/>
           <a:p>
-            <a:pPr indent="0" marL="0">
+            <a:pPr marL="0" indent="0">
               <a:lnSpc>
                 <a:spcPct val="106000"/>
               </a:lnSpc>
@@ -5773,7 +6075,7 @@
           <a:bodyPr wrap="square" lIns="0" tIns="0" rIns="0" bIns="0" rtlCol="0" anchor="ctr"/>
           <a:lstStyle/>
           <a:p>
-            <a:pPr indent="0" marL="0">
+            <a:pPr marL="0" indent="0">
               <a:buNone/>
             </a:pPr>
             <a:r>
@@ -5812,6 +6114,13 @@
           </a:solidFill>
           <a:ln/>
         </p:spPr>
+        <p:txBody>
+          <a:bodyPr/>
+          <a:lstStyle/>
+          <a:p>
+            <a:endParaRPr lang="en-PH"/>
+          </a:p>
+        </p:txBody>
       </p:sp>
       <p:sp>
         <p:nvSpPr>
@@ -5834,7 +6143,7 @@
           <a:bodyPr wrap="square" lIns="0" tIns="0" rIns="0" bIns="0" rtlCol="0" anchor="ctr"/>
           <a:lstStyle/>
           <a:p>
-            <a:pPr algn="ctr" indent="0" marL="0">
+            <a:pPr marL="0" indent="0" algn="ctr">
               <a:buNone/>
             </a:pPr>
             <a:r>
@@ -5873,7 +6182,7 @@
           <a:bodyPr wrap="square" lIns="0" tIns="0" rIns="0" bIns="0" rtlCol="0" anchor="ctr"/>
           <a:lstStyle/>
           <a:p>
-            <a:pPr algn="r" indent="0" marL="0">
+            <a:pPr marL="0" indent="0" algn="r">
               <a:buNone/>
             </a:pPr>
             <a:r>
@@ -5935,6 +6244,13 @@
           </a:solidFill>
           <a:ln/>
         </p:spPr>
+        <p:txBody>
+          <a:bodyPr/>
+          <a:lstStyle/>
+          <a:p>
+            <a:endParaRPr lang="en-PH"/>
+          </a:p>
+        </p:txBody>
       </p:sp>
       <p:sp>
         <p:nvSpPr>
@@ -5959,6 +6275,13 @@
             <a:prstDash val="solid"/>
           </a:ln>
         </p:spPr>
+        <p:txBody>
+          <a:bodyPr/>
+          <a:lstStyle/>
+          <a:p>
+            <a:endParaRPr lang="en-PH"/>
+          </a:p>
+        </p:txBody>
       </p:sp>
       <p:sp>
         <p:nvSpPr>
@@ -5981,7 +6304,7 @@
           <a:bodyPr wrap="square" lIns="0" tIns="0" rIns="0" bIns="0" rtlCol="0" anchor="ctr"/>
           <a:lstStyle/>
           <a:p>
-            <a:pPr algn="ctr" indent="0" marL="0">
+            <a:pPr marL="0" indent="0" algn="ctr">
               <a:buNone/>
             </a:pPr>
             <a:r>
@@ -6022,7 +6345,7 @@
           </a:bodyPr>
           <a:lstStyle/>
           <a:p>
-            <a:pPr algn="l" indent="0" marL="0">
+            <a:pPr marL="0" indent="0" algn="l">
               <a:lnSpc>
                 <a:spcPct val="108000"/>
               </a:lnSpc>
@@ -6062,11 +6385,11 @@
         </p:spPr>
         <p:txBody>
           <a:bodyPr wrap="square" lIns="0" tIns="0" rIns="0" bIns="0" rtlCol="0" anchor="t">
-            <a:normAutofit/>
+            <a:normAutofit lnSpcReduction="10000"/>
           </a:bodyPr>
           <a:lstStyle/>
           <a:p>
-            <a:pPr algn="l" indent="0" marL="0">
+            <a:pPr marL="0" indent="0" algn="l">
               <a:lnSpc>
                 <a:spcPct val="108000"/>
               </a:lnSpc>
@@ -6110,7 +6433,7 @@
           </a:bodyPr>
           <a:lstStyle/>
           <a:p>
-            <a:pPr algn="l" indent="0" marL="0">
+            <a:pPr marL="0" indent="0" algn="l">
               <a:lnSpc>
                 <a:spcPct val="108000"/>
               </a:lnSpc>
@@ -6154,7 +6477,7 @@
           </a:bodyPr>
           <a:lstStyle/>
           <a:p>
-            <a:pPr algn="l" indent="0" marL="0">
+            <a:pPr marL="0" indent="0" algn="l">
               <a:lnSpc>
                 <a:spcPct val="108000"/>
               </a:lnSpc>
@@ -6194,11 +6517,11 @@
         </p:spPr>
         <p:txBody>
           <a:bodyPr wrap="square" lIns="0" tIns="0" rIns="0" bIns="0" rtlCol="0" anchor="t">
-            <a:normAutofit/>
+            <a:normAutofit lnSpcReduction="10000"/>
           </a:bodyPr>
           <a:lstStyle/>
           <a:p>
-            <a:pPr algn="l" indent="0" marL="0">
+            <a:pPr marL="0" indent="0" algn="l">
               <a:lnSpc>
                 <a:spcPct val="108000"/>
               </a:lnSpc>
@@ -6240,6 +6563,13 @@
           </a:solidFill>
           <a:ln/>
         </p:spPr>
+        <p:txBody>
+          <a:bodyPr/>
+          <a:lstStyle/>
+          <a:p>
+            <a:endParaRPr lang="en-PH"/>
+          </a:p>
+        </p:txBody>
       </p:sp>
       <p:sp>
         <p:nvSpPr>
@@ -6262,7 +6592,7 @@
           <a:bodyPr wrap="square" lIns="0" tIns="0" rIns="0" bIns="0" rtlCol="0" anchor="ctr"/>
           <a:lstStyle/>
           <a:p>
-            <a:pPr algn="ctr" indent="0" marL="0">
+            <a:pPr marL="0" indent="0" algn="ctr">
               <a:buNone/>
             </a:pPr>
             <a:r>
@@ -6301,7 +6631,7 @@
           <a:bodyPr wrap="square" lIns="0" tIns="0" rIns="0" bIns="0" rtlCol="0" anchor="ctr"/>
           <a:lstStyle/>
           <a:p>
-            <a:pPr algn="r" indent="0" marL="0">
+            <a:pPr marL="0" indent="0" algn="r">
               <a:buNone/>
             </a:pPr>
             <a:r>
@@ -6363,6 +6693,13 @@
           </a:solidFill>
           <a:ln/>
         </p:spPr>
+        <p:txBody>
+          <a:bodyPr/>
+          <a:lstStyle/>
+          <a:p>
+            <a:endParaRPr lang="en-PH"/>
+          </a:p>
+        </p:txBody>
       </p:sp>
       <p:sp>
         <p:nvSpPr>
@@ -6387,6 +6724,13 @@
             <a:prstDash val="solid"/>
           </a:ln>
         </p:spPr>
+        <p:txBody>
+          <a:bodyPr/>
+          <a:lstStyle/>
+          <a:p>
+            <a:endParaRPr lang="en-PH"/>
+          </a:p>
+        </p:txBody>
       </p:sp>
       <p:sp>
         <p:nvSpPr>
@@ -6409,7 +6753,7 @@
           <a:bodyPr wrap="square" lIns="0" tIns="0" rIns="0" bIns="0" rtlCol="0" anchor="ctr"/>
           <a:lstStyle/>
           <a:p>
-            <a:pPr algn="ctr" indent="0" marL="0">
+            <a:pPr marL="0" indent="0" algn="ctr">
               <a:buNone/>
             </a:pPr>
             <a:r>
@@ -6450,7 +6794,7 @@
           </a:bodyPr>
           <a:lstStyle/>
           <a:p>
-            <a:pPr algn="l" indent="0" marL="0">
+            <a:pPr marL="0" indent="0" algn="l">
               <a:lnSpc>
                 <a:spcPct val="108000"/>
               </a:lnSpc>
@@ -6490,11 +6834,11 @@
         </p:spPr>
         <p:txBody>
           <a:bodyPr wrap="square" lIns="0" tIns="0" rIns="0" bIns="0" rtlCol="0" anchor="t">
-            <a:normAutofit/>
+            <a:normAutofit lnSpcReduction="10000"/>
           </a:bodyPr>
           <a:lstStyle/>
           <a:p>
-            <a:pPr algn="l" indent="0" marL="0">
+            <a:pPr marL="0" indent="0" algn="l">
               <a:lnSpc>
                 <a:spcPct val="108000"/>
               </a:lnSpc>
@@ -6538,7 +6882,7 @@
           </a:bodyPr>
           <a:lstStyle/>
           <a:p>
-            <a:pPr algn="l" indent="0" marL="0">
+            <a:pPr marL="0" indent="0" algn="l">
               <a:lnSpc>
                 <a:spcPct val="108000"/>
               </a:lnSpc>
@@ -6578,11 +6922,11 @@
         </p:spPr>
         <p:txBody>
           <a:bodyPr wrap="square" lIns="0" tIns="0" rIns="0" bIns="0" rtlCol="0" anchor="t">
-            <a:normAutofit/>
+            <a:normAutofit lnSpcReduction="10000"/>
           </a:bodyPr>
           <a:lstStyle/>
           <a:p>
-            <a:pPr algn="l" indent="0" marL="0">
+            <a:pPr marL="0" indent="0" algn="l">
               <a:lnSpc>
                 <a:spcPct val="108000"/>
               </a:lnSpc>
@@ -6626,7 +6970,7 @@
           </a:bodyPr>
           <a:lstStyle/>
           <a:p>
-            <a:pPr algn="l" indent="0" marL="0">
+            <a:pPr marL="0" indent="0" algn="l">
               <a:lnSpc>
                 <a:spcPct val="108000"/>
               </a:lnSpc>
@@ -6668,6 +7012,13 @@
           </a:solidFill>
           <a:ln/>
         </p:spPr>
+        <p:txBody>
+          <a:bodyPr/>
+          <a:lstStyle/>
+          <a:p>
+            <a:endParaRPr lang="en-PH"/>
+          </a:p>
+        </p:txBody>
       </p:sp>
       <p:sp>
         <p:nvSpPr>
@@ -6690,7 +7041,7 @@
           <a:bodyPr wrap="square" lIns="0" tIns="0" rIns="0" bIns="0" rtlCol="0" anchor="ctr"/>
           <a:lstStyle/>
           <a:p>
-            <a:pPr algn="ctr" indent="0" marL="0">
+            <a:pPr marL="0" indent="0" algn="ctr">
               <a:buNone/>
             </a:pPr>
             <a:r>
@@ -6729,7 +7080,7 @@
           <a:bodyPr wrap="square" lIns="0" tIns="0" rIns="0" bIns="0" rtlCol="0" anchor="ctr"/>
           <a:lstStyle/>
           <a:p>
-            <a:pPr algn="r" indent="0" marL="0">
+            <a:pPr marL="0" indent="0" algn="r">
               <a:buNone/>
             </a:pPr>
             <a:r>
@@ -6791,6 +7142,13 @@
           </a:solidFill>
           <a:ln/>
         </p:spPr>
+        <p:txBody>
+          <a:bodyPr/>
+          <a:lstStyle/>
+          <a:p>
+            <a:endParaRPr lang="en-PH"/>
+          </a:p>
+        </p:txBody>
       </p:sp>
       <p:sp>
         <p:nvSpPr>
@@ -6813,7 +7171,7 @@
           <a:bodyPr wrap="square" lIns="0" tIns="0" rIns="0" bIns="0" rtlCol="0" anchor="ctr"/>
           <a:lstStyle/>
           <a:p>
-            <a:pPr indent="0" marL="0">
+            <a:pPr marL="0" indent="0">
               <a:buNone/>
             </a:pPr>
             <a:r>
@@ -6852,7 +7210,7 @@
           <a:bodyPr wrap="square" lIns="0" tIns="0" rIns="0" bIns="0" rtlCol="0" anchor="ctr"/>
           <a:lstStyle/>
           <a:p>
-            <a:pPr indent="0" marL="0">
+            <a:pPr marL="0" indent="0">
               <a:buNone/>
             </a:pPr>
             <a:r>
@@ -6891,6 +7249,13 @@
           </a:solidFill>
           <a:ln/>
         </p:spPr>
+        <p:txBody>
+          <a:bodyPr/>
+          <a:lstStyle/>
+          <a:p>
+            <a:endParaRPr lang="en-PH"/>
+          </a:p>
+        </p:txBody>
       </p:sp>
       <p:sp>
         <p:nvSpPr>
@@ -6913,7 +7278,7 @@
           <a:bodyPr wrap="square" lIns="0" tIns="0" rIns="0" bIns="0" rtlCol="0" anchor="ctr"/>
           <a:lstStyle/>
           <a:p>
-            <a:pPr algn="ctr" indent="0" marL="0">
+            <a:pPr marL="0" indent="0" algn="ctr">
               <a:buNone/>
             </a:pPr>
             <a:r>
@@ -6952,7 +7317,7 @@
           <a:bodyPr wrap="square" lIns="0" tIns="0" rIns="0" bIns="0" rtlCol="0" anchor="t"/>
           <a:lstStyle/>
           <a:p>
-            <a:pPr indent="0" marL="0">
+            <a:pPr marL="0" indent="0">
               <a:lnSpc>
                 <a:spcPct val="106000"/>
               </a:lnSpc>
@@ -6994,7 +7359,7 @@
           <a:bodyPr wrap="square" lIns="0" tIns="0" rIns="0" bIns="0" rtlCol="0" anchor="ctr"/>
           <a:lstStyle/>
           <a:p>
-            <a:pPr indent="0" marL="0">
+            <a:pPr marL="0" indent="0">
               <a:buNone/>
             </a:pPr>
             <a:r>
@@ -7033,6 +7398,13 @@
           </a:solidFill>
           <a:ln/>
         </p:spPr>
+        <p:txBody>
+          <a:bodyPr/>
+          <a:lstStyle/>
+          <a:p>
+            <a:endParaRPr lang="en-PH"/>
+          </a:p>
+        </p:txBody>
       </p:sp>
       <p:sp>
         <p:nvSpPr>
@@ -7055,7 +7427,7 @@
           <a:bodyPr wrap="square" lIns="0" tIns="0" rIns="0" bIns="0" rtlCol="0" anchor="ctr"/>
           <a:lstStyle/>
           <a:p>
-            <a:pPr algn="ctr" indent="0" marL="0">
+            <a:pPr marL="0" indent="0" algn="ctr">
               <a:buNone/>
             </a:pPr>
             <a:r>
@@ -7094,7 +7466,7 @@
           <a:bodyPr wrap="square" lIns="0" tIns="0" rIns="0" bIns="0" rtlCol="0" anchor="ctr"/>
           <a:lstStyle/>
           <a:p>
-            <a:pPr algn="r" indent="0" marL="0">
+            <a:pPr marL="0" indent="0" algn="r">
               <a:buNone/>
             </a:pPr>
             <a:r>
@@ -7156,6 +7528,13 @@
           </a:solidFill>
           <a:ln/>
         </p:spPr>
+        <p:txBody>
+          <a:bodyPr/>
+          <a:lstStyle/>
+          <a:p>
+            <a:endParaRPr lang="en-PH"/>
+          </a:p>
+        </p:txBody>
       </p:sp>
       <p:sp>
         <p:nvSpPr>
@@ -7180,6 +7559,13 @@
             <a:prstDash val="solid"/>
           </a:ln>
         </p:spPr>
+        <p:txBody>
+          <a:bodyPr/>
+          <a:lstStyle/>
+          <a:p>
+            <a:endParaRPr lang="en-PH"/>
+          </a:p>
+        </p:txBody>
       </p:sp>
       <p:sp>
         <p:nvSpPr>
@@ -7202,7 +7588,7 @@
           <a:bodyPr wrap="square" lIns="0" tIns="0" rIns="0" bIns="0" rtlCol="0" anchor="ctr"/>
           <a:lstStyle/>
           <a:p>
-            <a:pPr algn="ctr" indent="0" marL="0">
+            <a:pPr marL="0" indent="0" algn="ctr">
               <a:buNone/>
             </a:pPr>
             <a:r>
@@ -7239,11 +7625,11 @@
         </p:spPr>
         <p:txBody>
           <a:bodyPr wrap="square" lIns="0" tIns="0" rIns="0" bIns="0" rtlCol="0" anchor="t">
-            <a:normAutofit/>
+            <a:normAutofit lnSpcReduction="10000"/>
           </a:bodyPr>
           <a:lstStyle/>
           <a:p>
-            <a:pPr algn="l" indent="0" marL="0">
+            <a:pPr marL="0" indent="0" algn="l">
               <a:lnSpc>
                 <a:spcPct val="108000"/>
               </a:lnSpc>
@@ -7283,11 +7669,11 @@
         </p:spPr>
         <p:txBody>
           <a:bodyPr wrap="square" lIns="0" tIns="0" rIns="0" bIns="0" rtlCol="0" anchor="t">
-            <a:normAutofit/>
+            <a:normAutofit lnSpcReduction="10000"/>
           </a:bodyPr>
           <a:lstStyle/>
           <a:p>
-            <a:pPr algn="l" indent="0" marL="0">
+            <a:pPr marL="0" indent="0" algn="l">
               <a:lnSpc>
                 <a:spcPct val="108000"/>
               </a:lnSpc>
@@ -7327,11 +7713,11 @@
         </p:spPr>
         <p:txBody>
           <a:bodyPr wrap="square" lIns="0" tIns="0" rIns="0" bIns="0" rtlCol="0" anchor="t">
-            <a:normAutofit/>
+            <a:normAutofit lnSpcReduction="10000"/>
           </a:bodyPr>
           <a:lstStyle/>
           <a:p>
-            <a:pPr algn="l" indent="0" marL="0">
+            <a:pPr marL="0" indent="0" algn="l">
               <a:lnSpc>
                 <a:spcPct val="108000"/>
               </a:lnSpc>
@@ -7373,6 +7759,13 @@
           </a:solidFill>
           <a:ln/>
         </p:spPr>
+        <p:txBody>
+          <a:bodyPr/>
+          <a:lstStyle/>
+          <a:p>
+            <a:endParaRPr lang="en-PH"/>
+          </a:p>
+        </p:txBody>
       </p:sp>
       <p:sp>
         <p:nvSpPr>
@@ -7395,7 +7788,7 @@
           <a:bodyPr wrap="square" lIns="0" tIns="0" rIns="0" bIns="0" rtlCol="0" anchor="ctr"/>
           <a:lstStyle/>
           <a:p>
-            <a:pPr algn="ctr" indent="0" marL="0">
+            <a:pPr marL="0" indent="0" algn="ctr">
               <a:buNone/>
             </a:pPr>
             <a:r>
@@ -7434,7 +7827,7 @@
           <a:bodyPr wrap="square" lIns="0" tIns="0" rIns="0" bIns="0" rtlCol="0" anchor="ctr"/>
           <a:lstStyle/>
           <a:p>
-            <a:pPr algn="r" indent="0" marL="0">
+            <a:pPr marL="0" indent="0" algn="r">
               <a:buNone/>
             </a:pPr>
             <a:r>
@@ -7496,6 +7889,13 @@
           </a:solidFill>
           <a:ln/>
         </p:spPr>
+        <p:txBody>
+          <a:bodyPr/>
+          <a:lstStyle/>
+          <a:p>
+            <a:endParaRPr lang="en-PH"/>
+          </a:p>
+        </p:txBody>
       </p:sp>
       <p:sp>
         <p:nvSpPr>
@@ -7520,6 +7920,13 @@
             <a:prstDash val="solid"/>
           </a:ln>
         </p:spPr>
+        <p:txBody>
+          <a:bodyPr/>
+          <a:lstStyle/>
+          <a:p>
+            <a:endParaRPr lang="en-PH"/>
+          </a:p>
+        </p:txBody>
       </p:sp>
       <p:sp>
         <p:nvSpPr>
@@ -7542,7 +7949,7 @@
           <a:bodyPr wrap="square" lIns="0" tIns="0" rIns="0" bIns="0" rtlCol="0" anchor="ctr"/>
           <a:lstStyle/>
           <a:p>
-            <a:pPr algn="ctr" indent="0" marL="0">
+            <a:pPr marL="0" indent="0" algn="ctr">
               <a:buNone/>
             </a:pPr>
             <a:r>
@@ -7583,7 +7990,7 @@
           </a:bodyPr>
           <a:lstStyle/>
           <a:p>
-            <a:pPr algn="l" indent="0" marL="0">
+            <a:pPr marL="0" indent="0" algn="l">
               <a:lnSpc>
                 <a:spcPct val="108000"/>
               </a:lnSpc>
@@ -7623,11 +8030,11 @@
         </p:spPr>
         <p:txBody>
           <a:bodyPr wrap="square" lIns="0" tIns="0" rIns="0" bIns="0" rtlCol="0" anchor="t">
-            <a:normAutofit/>
+            <a:normAutofit lnSpcReduction="10000"/>
           </a:bodyPr>
           <a:lstStyle/>
           <a:p>
-            <a:pPr algn="l" indent="0" marL="0">
+            <a:pPr marL="0" indent="0" algn="l">
               <a:lnSpc>
                 <a:spcPct val="108000"/>
               </a:lnSpc>
@@ -7671,7 +8078,7 @@
           </a:bodyPr>
           <a:lstStyle/>
           <a:p>
-            <a:pPr algn="l" indent="0" marL="0">
+            <a:pPr marL="0" indent="0" algn="l">
               <a:lnSpc>
                 <a:spcPct val="108000"/>
               </a:lnSpc>
@@ -7711,11 +8118,11 @@
         </p:spPr>
         <p:txBody>
           <a:bodyPr wrap="square" lIns="0" tIns="0" rIns="0" bIns="0" rtlCol="0" anchor="t">
-            <a:normAutofit/>
+            <a:normAutofit lnSpcReduction="10000"/>
           </a:bodyPr>
           <a:lstStyle/>
           <a:p>
-            <a:pPr algn="l" indent="0" marL="0">
+            <a:pPr marL="0" indent="0" algn="l">
               <a:lnSpc>
                 <a:spcPct val="108000"/>
               </a:lnSpc>
@@ -7757,6 +8164,13 @@
           </a:solidFill>
           <a:ln/>
         </p:spPr>
+        <p:txBody>
+          <a:bodyPr/>
+          <a:lstStyle/>
+          <a:p>
+            <a:endParaRPr lang="en-PH"/>
+          </a:p>
+        </p:txBody>
       </p:sp>
       <p:sp>
         <p:nvSpPr>
@@ -7779,7 +8193,7 @@
           <a:bodyPr wrap="square" lIns="0" tIns="0" rIns="0" bIns="0" rtlCol="0" anchor="ctr"/>
           <a:lstStyle/>
           <a:p>
-            <a:pPr algn="ctr" indent="0" marL="0">
+            <a:pPr marL="0" indent="0" algn="ctr">
               <a:buNone/>
             </a:pPr>
             <a:r>
@@ -7818,7 +8232,7 @@
           <a:bodyPr wrap="square" lIns="0" tIns="0" rIns="0" bIns="0" rtlCol="0" anchor="ctr"/>
           <a:lstStyle/>
           <a:p>
-            <a:pPr algn="r" indent="0" marL="0">
+            <a:pPr marL="0" indent="0" algn="r">
               <a:buNone/>
             </a:pPr>
             <a:r>
@@ -7880,6 +8294,13 @@
           </a:solidFill>
           <a:ln/>
         </p:spPr>
+        <p:txBody>
+          <a:bodyPr/>
+          <a:lstStyle/>
+          <a:p>
+            <a:endParaRPr lang="en-PH"/>
+          </a:p>
+        </p:txBody>
       </p:sp>
       <p:sp>
         <p:nvSpPr>
@@ -7902,7 +8323,7 @@
           <a:bodyPr wrap="square" lIns="0" tIns="0" rIns="0" bIns="0" rtlCol="0" anchor="ctr"/>
           <a:lstStyle/>
           <a:p>
-            <a:pPr indent="0" marL="0">
+            <a:pPr marL="0" indent="0">
               <a:buNone/>
             </a:pPr>
             <a:r>
@@ -7941,7 +8362,7 @@
           <a:bodyPr wrap="square" lIns="0" tIns="0" rIns="0" bIns="0" rtlCol="0" anchor="ctr"/>
           <a:lstStyle/>
           <a:p>
-            <a:pPr indent="0" marL="0">
+            <a:pPr marL="0" indent="0">
               <a:buNone/>
             </a:pPr>
             <a:r>
@@ -7980,6 +8401,13 @@
           </a:solidFill>
           <a:ln/>
         </p:spPr>
+        <p:txBody>
+          <a:bodyPr/>
+          <a:lstStyle/>
+          <a:p>
+            <a:endParaRPr lang="en-PH"/>
+          </a:p>
+        </p:txBody>
       </p:sp>
       <p:sp>
         <p:nvSpPr>
@@ -8002,7 +8430,7 @@
           <a:bodyPr wrap="square" lIns="0" tIns="0" rIns="0" bIns="0" rtlCol="0" anchor="ctr"/>
           <a:lstStyle/>
           <a:p>
-            <a:pPr algn="ctr" indent="0" marL="0">
+            <a:pPr marL="0" indent="0" algn="ctr">
               <a:buNone/>
             </a:pPr>
             <a:r>
@@ -8041,7 +8469,7 @@
           <a:bodyPr wrap="square" lIns="0" tIns="0" rIns="0" bIns="0" rtlCol="0" anchor="t"/>
           <a:lstStyle/>
           <a:p>
-            <a:pPr indent="0" marL="0">
+            <a:pPr marL="0" indent="0">
               <a:lnSpc>
                 <a:spcPct val="106000"/>
               </a:lnSpc>
@@ -8083,7 +8511,7 @@
           <a:bodyPr wrap="square" lIns="0" tIns="0" rIns="0" bIns="0" rtlCol="0" anchor="ctr"/>
           <a:lstStyle/>
           <a:p>
-            <a:pPr indent="0" marL="0">
+            <a:pPr marL="0" indent="0">
               <a:buNone/>
             </a:pPr>
             <a:r>
@@ -8122,6 +8550,13 @@
           </a:solidFill>
           <a:ln/>
         </p:spPr>
+        <p:txBody>
+          <a:bodyPr/>
+          <a:lstStyle/>
+          <a:p>
+            <a:endParaRPr lang="en-PH"/>
+          </a:p>
+        </p:txBody>
       </p:sp>
       <p:sp>
         <p:nvSpPr>
@@ -8144,7 +8579,7 @@
           <a:bodyPr wrap="square" lIns="0" tIns="0" rIns="0" bIns="0" rtlCol="0" anchor="ctr"/>
           <a:lstStyle/>
           <a:p>
-            <a:pPr algn="ctr" indent="0" marL="0">
+            <a:pPr marL="0" indent="0" algn="ctr">
               <a:buNone/>
             </a:pPr>
             <a:r>
@@ -8183,7 +8618,7 @@
           <a:bodyPr wrap="square" lIns="0" tIns="0" rIns="0" bIns="0" rtlCol="0" anchor="ctr"/>
           <a:lstStyle/>
           <a:p>
-            <a:pPr algn="r" indent="0" marL="0">
+            <a:pPr marL="0" indent="0" algn="r">
               <a:buNone/>
             </a:pPr>
             <a:r>
@@ -8245,6 +8680,13 @@
           </a:solidFill>
           <a:ln/>
         </p:spPr>
+        <p:txBody>
+          <a:bodyPr/>
+          <a:lstStyle/>
+          <a:p>
+            <a:endParaRPr lang="en-PH"/>
+          </a:p>
+        </p:txBody>
       </p:sp>
       <p:sp>
         <p:nvSpPr>
@@ -8269,6 +8711,13 @@
             <a:prstDash val="solid"/>
           </a:ln>
         </p:spPr>
+        <p:txBody>
+          <a:bodyPr/>
+          <a:lstStyle/>
+          <a:p>
+            <a:endParaRPr lang="en-PH"/>
+          </a:p>
+        </p:txBody>
       </p:sp>
       <p:sp>
         <p:nvSpPr>
@@ -8291,7 +8740,7 @@
           <a:bodyPr wrap="square" lIns="0" tIns="0" rIns="0" bIns="0" rtlCol="0" anchor="ctr"/>
           <a:lstStyle/>
           <a:p>
-            <a:pPr algn="ctr" indent="0" marL="0">
+            <a:pPr marL="0" indent="0" algn="ctr">
               <a:buNone/>
             </a:pPr>
             <a:r>
@@ -8328,11 +8777,11 @@
         </p:spPr>
         <p:txBody>
           <a:bodyPr wrap="square" lIns="0" tIns="0" rIns="0" bIns="0" rtlCol="0" anchor="t">
-            <a:normAutofit/>
+            <a:normAutofit lnSpcReduction="10000"/>
           </a:bodyPr>
           <a:lstStyle/>
           <a:p>
-            <a:pPr algn="l" indent="0" marL="0">
+            <a:pPr marL="0" indent="0" algn="l">
               <a:lnSpc>
                 <a:spcPct val="108000"/>
               </a:lnSpc>
@@ -8372,11 +8821,11 @@
         </p:spPr>
         <p:txBody>
           <a:bodyPr wrap="square" lIns="0" tIns="0" rIns="0" bIns="0" rtlCol="0" anchor="t">
-            <a:normAutofit/>
+            <a:normAutofit lnSpcReduction="10000"/>
           </a:bodyPr>
           <a:lstStyle/>
           <a:p>
-            <a:pPr algn="l" indent="0" marL="0">
+            <a:pPr marL="0" indent="0" algn="l">
               <a:lnSpc>
                 <a:spcPct val="108000"/>
               </a:lnSpc>
@@ -8420,7 +8869,7 @@
           </a:bodyPr>
           <a:lstStyle/>
           <a:p>
-            <a:pPr algn="l" indent="0" marL="0">
+            <a:pPr marL="0" indent="0" algn="l">
               <a:lnSpc>
                 <a:spcPct val="108000"/>
               </a:lnSpc>
@@ -8460,11 +8909,11 @@
         </p:spPr>
         <p:txBody>
           <a:bodyPr wrap="square" lIns="0" tIns="0" rIns="0" bIns="0" rtlCol="0" anchor="t">
-            <a:normAutofit/>
+            <a:normAutofit lnSpcReduction="10000"/>
           </a:bodyPr>
           <a:lstStyle/>
           <a:p>
-            <a:pPr algn="l" indent="0" marL="0">
+            <a:pPr marL="0" indent="0" algn="l">
               <a:lnSpc>
                 <a:spcPct val="108000"/>
               </a:lnSpc>
@@ -8506,6 +8955,13 @@
           </a:solidFill>
           <a:ln/>
         </p:spPr>
+        <p:txBody>
+          <a:bodyPr/>
+          <a:lstStyle/>
+          <a:p>
+            <a:endParaRPr lang="en-PH"/>
+          </a:p>
+        </p:txBody>
       </p:sp>
       <p:sp>
         <p:nvSpPr>
@@ -8528,7 +8984,7 @@
           <a:bodyPr wrap="square" lIns="0" tIns="0" rIns="0" bIns="0" rtlCol="0" anchor="ctr"/>
           <a:lstStyle/>
           <a:p>
-            <a:pPr algn="ctr" indent="0" marL="0">
+            <a:pPr marL="0" indent="0" algn="ctr">
               <a:buNone/>
             </a:pPr>
             <a:r>
@@ -8567,7 +9023,7 @@
           <a:bodyPr wrap="square" lIns="0" tIns="0" rIns="0" bIns="0" rtlCol="0" anchor="ctr"/>
           <a:lstStyle/>
           <a:p>
-            <a:pPr algn="r" indent="0" marL="0">
+            <a:pPr marL="0" indent="0" algn="r">
               <a:buNone/>
             </a:pPr>
             <a:r>
@@ -8629,6 +9085,13 @@
           </a:solidFill>
           <a:ln/>
         </p:spPr>
+        <p:txBody>
+          <a:bodyPr/>
+          <a:lstStyle/>
+          <a:p>
+            <a:endParaRPr lang="en-PH"/>
+          </a:p>
+        </p:txBody>
       </p:sp>
       <p:sp>
         <p:nvSpPr>
@@ -8653,6 +9116,13 @@
             <a:prstDash val="solid"/>
           </a:ln>
         </p:spPr>
+        <p:txBody>
+          <a:bodyPr/>
+          <a:lstStyle/>
+          <a:p>
+            <a:endParaRPr lang="en-PH"/>
+          </a:p>
+        </p:txBody>
       </p:sp>
       <p:sp>
         <p:nvSpPr>
@@ -8675,7 +9145,7 @@
           <a:bodyPr wrap="square" lIns="0" tIns="0" rIns="0" bIns="0" rtlCol="0" anchor="ctr"/>
           <a:lstStyle/>
           <a:p>
-            <a:pPr algn="ctr" indent="0" marL="0">
+            <a:pPr marL="0" indent="0" algn="ctr">
               <a:buNone/>
             </a:pPr>
             <a:r>
@@ -8712,11 +9182,11 @@
         </p:spPr>
         <p:txBody>
           <a:bodyPr wrap="square" lIns="0" tIns="0" rIns="0" bIns="0" rtlCol="0" anchor="t">
-            <a:normAutofit/>
+            <a:normAutofit lnSpcReduction="10000"/>
           </a:bodyPr>
           <a:lstStyle/>
           <a:p>
-            <a:pPr algn="l" indent="0" marL="0">
+            <a:pPr marL="0" indent="0" algn="l">
               <a:lnSpc>
                 <a:spcPct val="108000"/>
               </a:lnSpc>
@@ -8760,7 +9230,7 @@
           </a:bodyPr>
           <a:lstStyle/>
           <a:p>
-            <a:pPr algn="l" indent="0" marL="0">
+            <a:pPr marL="0" indent="0" algn="l">
               <a:lnSpc>
                 <a:spcPct val="108000"/>
               </a:lnSpc>
@@ -8804,7 +9274,7 @@
           </a:bodyPr>
           <a:lstStyle/>
           <a:p>
-            <a:pPr algn="l" indent="0" marL="0">
+            <a:pPr marL="0" indent="0" algn="l">
               <a:lnSpc>
                 <a:spcPct val="108000"/>
               </a:lnSpc>
@@ -8846,6 +9316,13 @@
           </a:solidFill>
           <a:ln/>
         </p:spPr>
+        <p:txBody>
+          <a:bodyPr/>
+          <a:lstStyle/>
+          <a:p>
+            <a:endParaRPr lang="en-PH"/>
+          </a:p>
+        </p:txBody>
       </p:sp>
       <p:sp>
         <p:nvSpPr>
@@ -8868,7 +9345,7 @@
           <a:bodyPr wrap="square" lIns="0" tIns="0" rIns="0" bIns="0" rtlCol="0" anchor="ctr"/>
           <a:lstStyle/>
           <a:p>
-            <a:pPr algn="ctr" indent="0" marL="0">
+            <a:pPr marL="0" indent="0" algn="ctr">
               <a:buNone/>
             </a:pPr>
             <a:r>
@@ -8907,7 +9384,7 @@
           <a:bodyPr wrap="square" lIns="0" tIns="0" rIns="0" bIns="0" rtlCol="0" anchor="ctr"/>
           <a:lstStyle/>
           <a:p>
-            <a:pPr algn="r" indent="0" marL="0">
+            <a:pPr marL="0" indent="0" algn="r">
               <a:buNone/>
             </a:pPr>
             <a:r>
@@ -8969,6 +9446,13 @@
           </a:solidFill>
           <a:ln/>
         </p:spPr>
+        <p:txBody>
+          <a:bodyPr/>
+          <a:lstStyle/>
+          <a:p>
+            <a:endParaRPr lang="en-PH"/>
+          </a:p>
+        </p:txBody>
       </p:sp>
       <p:sp>
         <p:nvSpPr>
@@ -8993,6 +9477,13 @@
             <a:prstDash val="solid"/>
           </a:ln>
         </p:spPr>
+        <p:txBody>
+          <a:bodyPr/>
+          <a:lstStyle/>
+          <a:p>
+            <a:endParaRPr lang="en-PH"/>
+          </a:p>
+        </p:txBody>
       </p:sp>
       <p:sp>
         <p:nvSpPr>
@@ -9015,7 +9506,7 @@
           <a:bodyPr wrap="square" lIns="0" tIns="0" rIns="0" bIns="0" rtlCol="0" anchor="ctr"/>
           <a:lstStyle/>
           <a:p>
-            <a:pPr algn="ctr" indent="0" marL="0">
+            <a:pPr marL="0" indent="0" algn="ctr">
               <a:buNone/>
             </a:pPr>
             <a:r>
@@ -9052,11 +9543,11 @@
         </p:spPr>
         <p:txBody>
           <a:bodyPr wrap="square" lIns="0" tIns="0" rIns="0" bIns="0" rtlCol="0" anchor="t">
-            <a:normAutofit/>
+            <a:normAutofit lnSpcReduction="10000"/>
           </a:bodyPr>
           <a:lstStyle/>
           <a:p>
-            <a:pPr algn="l" indent="0" marL="0">
+            <a:pPr marL="0" indent="0" algn="l">
               <a:lnSpc>
                 <a:spcPct val="108000"/>
               </a:lnSpc>
@@ -9100,7 +9591,7 @@
           </a:bodyPr>
           <a:lstStyle/>
           <a:p>
-            <a:pPr algn="l" indent="0" marL="0">
+            <a:pPr marL="0" indent="0" algn="l">
               <a:lnSpc>
                 <a:spcPct val="108000"/>
               </a:lnSpc>
@@ -9140,11 +9631,11 @@
         </p:spPr>
         <p:txBody>
           <a:bodyPr wrap="square" lIns="0" tIns="0" rIns="0" bIns="0" rtlCol="0" anchor="t">
-            <a:normAutofit/>
+            <a:normAutofit lnSpcReduction="10000"/>
           </a:bodyPr>
           <a:lstStyle/>
           <a:p>
-            <a:pPr algn="l" indent="0" marL="0">
+            <a:pPr marL="0" indent="0" algn="l">
               <a:lnSpc>
                 <a:spcPct val="108000"/>
               </a:lnSpc>
@@ -9188,7 +9679,7 @@
           </a:bodyPr>
           <a:lstStyle/>
           <a:p>
-            <a:pPr algn="l" indent="0" marL="0">
+            <a:pPr marL="0" indent="0" algn="l">
               <a:lnSpc>
                 <a:spcPct val="108000"/>
               </a:lnSpc>
@@ -9230,6 +9721,13 @@
           </a:solidFill>
           <a:ln/>
         </p:spPr>
+        <p:txBody>
+          <a:bodyPr/>
+          <a:lstStyle/>
+          <a:p>
+            <a:endParaRPr lang="en-PH"/>
+          </a:p>
+        </p:txBody>
       </p:sp>
       <p:sp>
         <p:nvSpPr>
@@ -9252,7 +9750,7 @@
           <a:bodyPr wrap="square" lIns="0" tIns="0" rIns="0" bIns="0" rtlCol="0" anchor="ctr"/>
           <a:lstStyle/>
           <a:p>
-            <a:pPr algn="ctr" indent="0" marL="0">
+            <a:pPr marL="0" indent="0" algn="ctr">
               <a:buNone/>
             </a:pPr>
             <a:r>
@@ -9291,7 +9789,7 @@
           <a:bodyPr wrap="square" lIns="0" tIns="0" rIns="0" bIns="0" rtlCol="0" anchor="ctr"/>
           <a:lstStyle/>
           <a:p>
-            <a:pPr algn="r" indent="0" marL="0">
+            <a:pPr marL="0" indent="0" algn="r">
               <a:buNone/>
             </a:pPr>
             <a:r>
@@ -9353,6 +9851,13 @@
           </a:solidFill>
           <a:ln/>
         </p:spPr>
+        <p:txBody>
+          <a:bodyPr/>
+          <a:lstStyle/>
+          <a:p>
+            <a:endParaRPr lang="en-PH"/>
+          </a:p>
+        </p:txBody>
       </p:sp>
       <p:sp>
         <p:nvSpPr>
@@ -9377,6 +9882,13 @@
             <a:prstDash val="solid"/>
           </a:ln>
         </p:spPr>
+        <p:txBody>
+          <a:bodyPr/>
+          <a:lstStyle/>
+          <a:p>
+            <a:endParaRPr lang="en-PH"/>
+          </a:p>
+        </p:txBody>
       </p:sp>
       <p:sp>
         <p:nvSpPr>
@@ -9399,7 +9911,7 @@
           <a:bodyPr wrap="square" lIns="0" tIns="0" rIns="0" bIns="0" rtlCol="0" anchor="ctr"/>
           <a:lstStyle/>
           <a:p>
-            <a:pPr algn="ctr" indent="0" marL="0">
+            <a:pPr marL="0" indent="0" algn="ctr">
               <a:buNone/>
             </a:pPr>
             <a:r>
@@ -9436,11 +9948,11 @@
         </p:spPr>
         <p:txBody>
           <a:bodyPr wrap="square" lIns="0" tIns="0" rIns="0" bIns="0" rtlCol="0" anchor="t">
-            <a:normAutofit/>
+            <a:normAutofit lnSpcReduction="10000"/>
           </a:bodyPr>
           <a:lstStyle/>
           <a:p>
-            <a:pPr algn="l" indent="0" marL="0">
+            <a:pPr marL="0" indent="0" algn="l">
               <a:lnSpc>
                 <a:spcPct val="108000"/>
               </a:lnSpc>
@@ -9484,7 +9996,7 @@
           </a:bodyPr>
           <a:lstStyle/>
           <a:p>
-            <a:pPr algn="l" indent="0" marL="0">
+            <a:pPr marL="0" indent="0" algn="l">
               <a:lnSpc>
                 <a:spcPct val="108000"/>
               </a:lnSpc>
@@ -9528,7 +10040,7 @@
           </a:bodyPr>
           <a:lstStyle/>
           <a:p>
-            <a:pPr algn="l" indent="0" marL="0">
+            <a:pPr marL="0" indent="0" algn="l">
               <a:lnSpc>
                 <a:spcPct val="108000"/>
               </a:lnSpc>
@@ -9572,7 +10084,7 @@
           </a:bodyPr>
           <a:lstStyle/>
           <a:p>
-            <a:pPr algn="l" indent="0" marL="0">
+            <a:pPr marL="0" indent="0" algn="l">
               <a:lnSpc>
                 <a:spcPct val="108000"/>
               </a:lnSpc>
@@ -9616,7 +10128,7 @@
           </a:bodyPr>
           <a:lstStyle/>
           <a:p>
-            <a:pPr algn="l" indent="0" marL="0">
+            <a:pPr marL="0" indent="0" algn="l">
               <a:lnSpc>
                 <a:spcPct val="108000"/>
               </a:lnSpc>
@@ -9658,6 +10170,13 @@
           </a:solidFill>
           <a:ln/>
         </p:spPr>
+        <p:txBody>
+          <a:bodyPr/>
+          <a:lstStyle/>
+          <a:p>
+            <a:endParaRPr lang="en-PH"/>
+          </a:p>
+        </p:txBody>
       </p:sp>
       <p:sp>
         <p:nvSpPr>
@@ -9680,7 +10199,7 @@
           <a:bodyPr wrap="square" lIns="0" tIns="0" rIns="0" bIns="0" rtlCol="0" anchor="ctr"/>
           <a:lstStyle/>
           <a:p>
-            <a:pPr algn="ctr" indent="0" marL="0">
+            <a:pPr marL="0" indent="0" algn="ctr">
               <a:buNone/>
             </a:pPr>
             <a:r>
@@ -9719,7 +10238,7 @@
           <a:bodyPr wrap="square" lIns="0" tIns="0" rIns="0" bIns="0" rtlCol="0" anchor="ctr"/>
           <a:lstStyle/>
           <a:p>
-            <a:pPr algn="r" indent="0" marL="0">
+            <a:pPr marL="0" indent="0" algn="r">
               <a:buNone/>
             </a:pPr>
             <a:r>
@@ -9781,6 +10300,13 @@
           </a:solidFill>
           <a:ln/>
         </p:spPr>
+        <p:txBody>
+          <a:bodyPr/>
+          <a:lstStyle/>
+          <a:p>
+            <a:endParaRPr lang="en-PH"/>
+          </a:p>
+        </p:txBody>
       </p:sp>
       <p:sp>
         <p:nvSpPr>
@@ -9805,6 +10331,13 @@
             <a:prstDash val="solid"/>
           </a:ln>
         </p:spPr>
+        <p:txBody>
+          <a:bodyPr/>
+          <a:lstStyle/>
+          <a:p>
+            <a:endParaRPr lang="en-PH"/>
+          </a:p>
+        </p:txBody>
       </p:sp>
       <p:sp>
         <p:nvSpPr>
@@ -9827,7 +10360,7 @@
           <a:bodyPr wrap="square" lIns="0" tIns="0" rIns="0" bIns="0" rtlCol="0" anchor="ctr"/>
           <a:lstStyle/>
           <a:p>
-            <a:pPr algn="ctr" indent="0" marL="0">
+            <a:pPr marL="0" indent="0" algn="ctr">
               <a:buNone/>
             </a:pPr>
             <a:r>
@@ -9868,7 +10401,7 @@
           </a:bodyPr>
           <a:lstStyle/>
           <a:p>
-            <a:pPr algn="l" indent="0" marL="0">
+            <a:pPr marL="0" indent="0" algn="l">
               <a:lnSpc>
                 <a:spcPct val="108000"/>
               </a:lnSpc>
@@ -9912,7 +10445,7 @@
           </a:bodyPr>
           <a:lstStyle/>
           <a:p>
-            <a:pPr algn="l" indent="0" marL="0">
+            <a:pPr marL="0" indent="0" algn="l">
               <a:lnSpc>
                 <a:spcPct val="108000"/>
               </a:lnSpc>
@@ -9952,11 +10485,11 @@
         </p:spPr>
         <p:txBody>
           <a:bodyPr wrap="square" lIns="0" tIns="0" rIns="0" bIns="0" rtlCol="0" anchor="t">
-            <a:normAutofit/>
+            <a:normAutofit lnSpcReduction="10000"/>
           </a:bodyPr>
           <a:lstStyle/>
           <a:p>
-            <a:pPr algn="l" indent="0" marL="0">
+            <a:pPr marL="0" indent="0" algn="l">
               <a:lnSpc>
                 <a:spcPct val="108000"/>
               </a:lnSpc>
@@ -9998,6 +10531,13 @@
           </a:solidFill>
           <a:ln/>
         </p:spPr>
+        <p:txBody>
+          <a:bodyPr/>
+          <a:lstStyle/>
+          <a:p>
+            <a:endParaRPr lang="en-PH"/>
+          </a:p>
+        </p:txBody>
       </p:sp>
       <p:sp>
         <p:nvSpPr>
@@ -10020,7 +10560,7 @@
           <a:bodyPr wrap="square" lIns="0" tIns="0" rIns="0" bIns="0" rtlCol="0" anchor="ctr"/>
           <a:lstStyle/>
           <a:p>
-            <a:pPr algn="ctr" indent="0" marL="0">
+            <a:pPr marL="0" indent="0" algn="ctr">
               <a:buNone/>
             </a:pPr>
             <a:r>
@@ -10059,7 +10599,7 @@
           <a:bodyPr wrap="square" lIns="0" tIns="0" rIns="0" bIns="0" rtlCol="0" anchor="ctr"/>
           <a:lstStyle/>
           <a:p>
-            <a:pPr algn="r" indent="0" marL="0">
+            <a:pPr marL="0" indent="0" algn="r">
               <a:buNone/>
             </a:pPr>
             <a:r>
@@ -10121,6 +10661,13 @@
           </a:solidFill>
           <a:ln/>
         </p:spPr>
+        <p:txBody>
+          <a:bodyPr/>
+          <a:lstStyle/>
+          <a:p>
+            <a:endParaRPr lang="en-PH"/>
+          </a:p>
+        </p:txBody>
       </p:sp>
       <p:sp>
         <p:nvSpPr>
@@ -10143,7 +10690,7 @@
           <a:bodyPr wrap="square" lIns="0" tIns="0" rIns="0" bIns="0" rtlCol="0" anchor="ctr"/>
           <a:lstStyle/>
           <a:p>
-            <a:pPr indent="0" marL="0">
+            <a:pPr marL="0" indent="0">
               <a:buNone/>
             </a:pPr>
             <a:r>
@@ -10182,7 +10729,7 @@
           <a:bodyPr wrap="square" lIns="0" tIns="0" rIns="0" bIns="0" rtlCol="0" anchor="ctr"/>
           <a:lstStyle/>
           <a:p>
-            <a:pPr indent="0" marL="0">
+            <a:pPr marL="0" indent="0">
               <a:buNone/>
             </a:pPr>
             <a:r>
@@ -10221,6 +10768,13 @@
           </a:solidFill>
           <a:ln/>
         </p:spPr>
+        <p:txBody>
+          <a:bodyPr/>
+          <a:lstStyle/>
+          <a:p>
+            <a:endParaRPr lang="en-PH"/>
+          </a:p>
+        </p:txBody>
       </p:sp>
       <p:sp>
         <p:nvSpPr>
@@ -10243,7 +10797,7 @@
           <a:bodyPr wrap="square" lIns="0" tIns="0" rIns="0" bIns="0" rtlCol="0" anchor="ctr"/>
           <a:lstStyle/>
           <a:p>
-            <a:pPr algn="ctr" indent="0" marL="0">
+            <a:pPr marL="0" indent="0" algn="ctr">
               <a:buNone/>
             </a:pPr>
             <a:r>
@@ -10282,7 +10836,7 @@
           <a:bodyPr wrap="square" lIns="0" tIns="0" rIns="0" bIns="0" rtlCol="0" anchor="t"/>
           <a:lstStyle/>
           <a:p>
-            <a:pPr indent="0" marL="0">
+            <a:pPr marL="0" indent="0">
               <a:lnSpc>
                 <a:spcPct val="106000"/>
               </a:lnSpc>
@@ -10324,7 +10878,7 @@
           <a:bodyPr wrap="square" lIns="0" tIns="0" rIns="0" bIns="0" rtlCol="0" anchor="ctr"/>
           <a:lstStyle/>
           <a:p>
-            <a:pPr indent="0" marL="0">
+            <a:pPr marL="0" indent="0">
               <a:buNone/>
             </a:pPr>
             <a:r>
@@ -10363,6 +10917,13 @@
           </a:solidFill>
           <a:ln/>
         </p:spPr>
+        <p:txBody>
+          <a:bodyPr/>
+          <a:lstStyle/>
+          <a:p>
+            <a:endParaRPr lang="en-PH"/>
+          </a:p>
+        </p:txBody>
       </p:sp>
       <p:sp>
         <p:nvSpPr>
@@ -10385,7 +10946,7 @@
           <a:bodyPr wrap="square" lIns="0" tIns="0" rIns="0" bIns="0" rtlCol="0" anchor="ctr"/>
           <a:lstStyle/>
           <a:p>
-            <a:pPr algn="ctr" indent="0" marL="0">
+            <a:pPr marL="0" indent="0" algn="ctr">
               <a:buNone/>
             </a:pPr>
             <a:r>
@@ -10424,7 +10985,7 @@
           <a:bodyPr wrap="square" lIns="0" tIns="0" rIns="0" bIns="0" rtlCol="0" anchor="ctr"/>
           <a:lstStyle/>
           <a:p>
-            <a:pPr algn="r" indent="0" marL="0">
+            <a:pPr marL="0" indent="0" algn="r">
               <a:buNone/>
             </a:pPr>
             <a:r>
@@ -10486,6 +11047,13 @@
           </a:solidFill>
           <a:ln/>
         </p:spPr>
+        <p:txBody>
+          <a:bodyPr/>
+          <a:lstStyle/>
+          <a:p>
+            <a:endParaRPr lang="en-PH"/>
+          </a:p>
+        </p:txBody>
       </p:sp>
       <p:sp>
         <p:nvSpPr>
@@ -10508,7 +11076,7 @@
           <a:bodyPr wrap="square" lIns="0" tIns="0" rIns="0" bIns="0" rtlCol="0" anchor="ctr"/>
           <a:lstStyle/>
           <a:p>
-            <a:pPr indent="0" marL="0">
+            <a:pPr marL="0" indent="0">
               <a:buNone/>
             </a:pPr>
             <a:r>
@@ -10547,7 +11115,7 @@
           <a:bodyPr wrap="square" lIns="0" tIns="0" rIns="0" bIns="0" rtlCol="0" anchor="ctr"/>
           <a:lstStyle/>
           <a:p>
-            <a:pPr indent="0" marL="0">
+            <a:pPr marL="0" indent="0">
               <a:buNone/>
             </a:pPr>
             <a:r>
@@ -10586,6 +11154,13 @@
           </a:solidFill>
           <a:ln/>
         </p:spPr>
+        <p:txBody>
+          <a:bodyPr/>
+          <a:lstStyle/>
+          <a:p>
+            <a:endParaRPr lang="en-PH"/>
+          </a:p>
+        </p:txBody>
       </p:sp>
       <p:sp>
         <p:nvSpPr>
@@ -10608,7 +11183,7 @@
           <a:bodyPr wrap="square" lIns="0" tIns="0" rIns="0" bIns="0" rtlCol="0" anchor="ctr"/>
           <a:lstStyle/>
           <a:p>
-            <a:pPr algn="ctr" indent="0" marL="0">
+            <a:pPr marL="0" indent="0" algn="ctr">
               <a:buNone/>
             </a:pPr>
             <a:r>
@@ -10647,7 +11222,7 @@
           <a:bodyPr wrap="square" lIns="0" tIns="0" rIns="0" bIns="0" rtlCol="0" anchor="t"/>
           <a:lstStyle/>
           <a:p>
-            <a:pPr indent="0" marL="0">
+            <a:pPr marL="0" indent="0">
               <a:lnSpc>
                 <a:spcPct val="106000"/>
               </a:lnSpc>
@@ -10689,7 +11264,7 @@
           <a:bodyPr wrap="square" lIns="0" tIns="0" rIns="0" bIns="0" rtlCol="0" anchor="ctr"/>
           <a:lstStyle/>
           <a:p>
-            <a:pPr indent="0" marL="0">
+            <a:pPr marL="0" indent="0">
               <a:buNone/>
             </a:pPr>
             <a:r>
@@ -10728,6 +11303,13 @@
           </a:solidFill>
           <a:ln/>
         </p:spPr>
+        <p:txBody>
+          <a:bodyPr/>
+          <a:lstStyle/>
+          <a:p>
+            <a:endParaRPr lang="en-PH"/>
+          </a:p>
+        </p:txBody>
       </p:sp>
       <p:sp>
         <p:nvSpPr>
@@ -10750,7 +11332,7 @@
           <a:bodyPr wrap="square" lIns="0" tIns="0" rIns="0" bIns="0" rtlCol="0" anchor="ctr"/>
           <a:lstStyle/>
           <a:p>
-            <a:pPr algn="ctr" indent="0" marL="0">
+            <a:pPr marL="0" indent="0" algn="ctr">
               <a:buNone/>
             </a:pPr>
             <a:r>
@@ -10789,7 +11371,7 @@
           <a:bodyPr wrap="square" lIns="0" tIns="0" rIns="0" bIns="0" rtlCol="0" anchor="ctr"/>
           <a:lstStyle/>
           <a:p>
-            <a:pPr algn="r" indent="0" marL="0">
+            <a:pPr marL="0" indent="0" algn="r">
               <a:buNone/>
             </a:pPr>
             <a:r>
@@ -10851,6 +11433,13 @@
           </a:solidFill>
           <a:ln/>
         </p:spPr>
+        <p:txBody>
+          <a:bodyPr/>
+          <a:lstStyle/>
+          <a:p>
+            <a:endParaRPr lang="en-PH"/>
+          </a:p>
+        </p:txBody>
       </p:sp>
       <p:sp>
         <p:nvSpPr>
@@ -10873,7 +11462,7 @@
           <a:bodyPr wrap="square" lIns="0" tIns="0" rIns="0" bIns="0" rtlCol="0" anchor="ctr"/>
           <a:lstStyle/>
           <a:p>
-            <a:pPr indent="0" marL="0">
+            <a:pPr marL="0" indent="0">
               <a:buNone/>
             </a:pPr>
             <a:r>
@@ -10912,7 +11501,7 @@
           <a:bodyPr wrap="square" lIns="0" tIns="0" rIns="0" bIns="0" rtlCol="0" anchor="ctr"/>
           <a:lstStyle/>
           <a:p>
-            <a:pPr indent="0" marL="0">
+            <a:pPr marL="0" indent="0">
               <a:buNone/>
             </a:pPr>
             <a:r>
@@ -10951,6 +11540,13 @@
           </a:solidFill>
           <a:ln/>
         </p:spPr>
+        <p:txBody>
+          <a:bodyPr/>
+          <a:lstStyle/>
+          <a:p>
+            <a:endParaRPr lang="en-PH"/>
+          </a:p>
+        </p:txBody>
       </p:sp>
       <p:sp>
         <p:nvSpPr>
@@ -10973,7 +11569,7 @@
           <a:bodyPr wrap="square" lIns="0" tIns="0" rIns="0" bIns="0" rtlCol="0" anchor="ctr"/>
           <a:lstStyle/>
           <a:p>
-            <a:pPr algn="ctr" indent="0" marL="0">
+            <a:pPr marL="0" indent="0" algn="ctr">
               <a:buNone/>
             </a:pPr>
             <a:r>
@@ -11012,7 +11608,7 @@
           <a:bodyPr wrap="square" lIns="0" tIns="0" rIns="0" bIns="0" rtlCol="0" anchor="t"/>
           <a:lstStyle/>
           <a:p>
-            <a:pPr indent="0" marL="0">
+            <a:pPr marL="0" indent="0">
               <a:lnSpc>
                 <a:spcPct val="106000"/>
               </a:lnSpc>
@@ -11054,7 +11650,7 @@
           <a:bodyPr wrap="square" lIns="0" tIns="0" rIns="0" bIns="0" rtlCol="0" anchor="ctr"/>
           <a:lstStyle/>
           <a:p>
-            <a:pPr indent="0" marL="0">
+            <a:pPr marL="0" indent="0">
               <a:buNone/>
             </a:pPr>
             <a:r>
@@ -11093,6 +11689,13 @@
           </a:solidFill>
           <a:ln/>
         </p:spPr>
+        <p:txBody>
+          <a:bodyPr/>
+          <a:lstStyle/>
+          <a:p>
+            <a:endParaRPr lang="en-PH"/>
+          </a:p>
+        </p:txBody>
       </p:sp>
       <p:sp>
         <p:nvSpPr>
@@ -11115,7 +11718,7 @@
           <a:bodyPr wrap="square" lIns="0" tIns="0" rIns="0" bIns="0" rtlCol="0" anchor="ctr"/>
           <a:lstStyle/>
           <a:p>
-            <a:pPr algn="ctr" indent="0" marL="0">
+            <a:pPr marL="0" indent="0" algn="ctr">
               <a:buNone/>
             </a:pPr>
             <a:r>
@@ -11154,7 +11757,7 @@
           <a:bodyPr wrap="square" lIns="0" tIns="0" rIns="0" bIns="0" rtlCol="0" anchor="ctr"/>
           <a:lstStyle/>
           <a:p>
-            <a:pPr algn="r" indent="0" marL="0">
+            <a:pPr marL="0" indent="0" algn="r">
               <a:buNone/>
             </a:pPr>
             <a:r>
@@ -11216,6 +11819,13 @@
           </a:solidFill>
           <a:ln/>
         </p:spPr>
+        <p:txBody>
+          <a:bodyPr/>
+          <a:lstStyle/>
+          <a:p>
+            <a:endParaRPr lang="en-PH"/>
+          </a:p>
+        </p:txBody>
       </p:sp>
       <p:sp>
         <p:nvSpPr>
@@ -11240,6 +11850,13 @@
             <a:prstDash val="solid"/>
           </a:ln>
         </p:spPr>
+        <p:txBody>
+          <a:bodyPr/>
+          <a:lstStyle/>
+          <a:p>
+            <a:endParaRPr lang="en-PH"/>
+          </a:p>
+        </p:txBody>
       </p:sp>
       <p:sp>
         <p:nvSpPr>
@@ -11262,7 +11879,7 @@
           <a:bodyPr wrap="square" lIns="0" tIns="0" rIns="0" bIns="0" rtlCol="0" anchor="ctr"/>
           <a:lstStyle/>
           <a:p>
-            <a:pPr algn="ctr" indent="0" marL="0">
+            <a:pPr marL="0" indent="0" algn="ctr">
               <a:buNone/>
             </a:pPr>
             <a:r>
@@ -11303,7 +11920,7 @@
           </a:bodyPr>
           <a:lstStyle/>
           <a:p>
-            <a:pPr algn="l" indent="0" marL="0">
+            <a:pPr marL="0" indent="0" algn="l">
               <a:lnSpc>
                 <a:spcPct val="108000"/>
               </a:lnSpc>
@@ -11347,7 +11964,7 @@
           </a:bodyPr>
           <a:lstStyle/>
           <a:p>
-            <a:pPr algn="l" indent="0" marL="0">
+            <a:pPr marL="0" indent="0" algn="l">
               <a:lnSpc>
                 <a:spcPct val="108000"/>
               </a:lnSpc>
@@ -11391,7 +12008,7 @@
           </a:bodyPr>
           <a:lstStyle/>
           <a:p>
-            <a:pPr algn="l" indent="0" marL="0">
+            <a:pPr marL="0" indent="0" algn="l">
               <a:lnSpc>
                 <a:spcPct val="108000"/>
               </a:lnSpc>
@@ -11435,7 +12052,7 @@
           </a:bodyPr>
           <a:lstStyle/>
           <a:p>
-            <a:pPr algn="l" indent="0" marL="0">
+            <a:pPr marL="0" indent="0" algn="l">
               <a:lnSpc>
                 <a:spcPct val="108000"/>
               </a:lnSpc>
@@ -11477,6 +12094,13 @@
           </a:solidFill>
           <a:ln/>
         </p:spPr>
+        <p:txBody>
+          <a:bodyPr/>
+          <a:lstStyle/>
+          <a:p>
+            <a:endParaRPr lang="en-PH"/>
+          </a:p>
+        </p:txBody>
       </p:sp>
       <p:sp>
         <p:nvSpPr>
@@ -11499,7 +12123,7 @@
           <a:bodyPr wrap="square" lIns="0" tIns="0" rIns="0" bIns="0" rtlCol="0" anchor="ctr"/>
           <a:lstStyle/>
           <a:p>
-            <a:pPr algn="ctr" indent="0" marL="0">
+            <a:pPr marL="0" indent="0" algn="ctr">
               <a:buNone/>
             </a:pPr>
             <a:r>
@@ -11538,7 +12162,7 @@
           <a:bodyPr wrap="square" lIns="0" tIns="0" rIns="0" bIns="0" rtlCol="0" anchor="ctr"/>
           <a:lstStyle/>
           <a:p>
-            <a:pPr algn="r" indent="0" marL="0">
+            <a:pPr marL="0" indent="0" algn="r">
               <a:buNone/>
             </a:pPr>
             <a:r>
@@ -11600,6 +12224,13 @@
           </a:solidFill>
           <a:ln/>
         </p:spPr>
+        <p:txBody>
+          <a:bodyPr/>
+          <a:lstStyle/>
+          <a:p>
+            <a:endParaRPr lang="en-PH"/>
+          </a:p>
+        </p:txBody>
       </p:sp>
       <p:sp>
         <p:nvSpPr>
@@ -11622,7 +12253,7 @@
           <a:bodyPr wrap="square" lIns="0" tIns="0" rIns="0" bIns="0" rtlCol="0" anchor="ctr"/>
           <a:lstStyle/>
           <a:p>
-            <a:pPr indent="0" marL="0">
+            <a:pPr marL="0" indent="0">
               <a:buNone/>
             </a:pPr>
             <a:r>
@@ -11661,7 +12292,7 @@
           <a:bodyPr wrap="square" lIns="0" tIns="0" rIns="0" bIns="0" rtlCol="0" anchor="ctr"/>
           <a:lstStyle/>
           <a:p>
-            <a:pPr indent="0" marL="0">
+            <a:pPr marL="0" indent="0">
               <a:buNone/>
             </a:pPr>
             <a:r>
@@ -11700,6 +12331,13 @@
           </a:solidFill>
           <a:ln/>
         </p:spPr>
+        <p:txBody>
+          <a:bodyPr/>
+          <a:lstStyle/>
+          <a:p>
+            <a:endParaRPr lang="en-PH"/>
+          </a:p>
+        </p:txBody>
       </p:sp>
       <p:sp>
         <p:nvSpPr>
@@ -11722,7 +12360,7 @@
           <a:bodyPr wrap="square" lIns="0" tIns="0" rIns="0" bIns="0" rtlCol="0" anchor="ctr"/>
           <a:lstStyle/>
           <a:p>
-            <a:pPr algn="ctr" indent="0" marL="0">
+            <a:pPr marL="0" indent="0" algn="ctr">
               <a:buNone/>
             </a:pPr>
             <a:r>
@@ -11761,7 +12399,7 @@
           <a:bodyPr wrap="square" lIns="0" tIns="0" rIns="0" bIns="0" rtlCol="0" anchor="t"/>
           <a:lstStyle/>
           <a:p>
-            <a:pPr indent="0" marL="0">
+            <a:pPr marL="0" indent="0">
               <a:lnSpc>
                 <a:spcPct val="106000"/>
               </a:lnSpc>
@@ -11803,7 +12441,7 @@
           <a:bodyPr wrap="square" lIns="0" tIns="0" rIns="0" bIns="0" rtlCol="0" anchor="ctr"/>
           <a:lstStyle/>
           <a:p>
-            <a:pPr indent="0" marL="0">
+            <a:pPr marL="0" indent="0">
               <a:buNone/>
             </a:pPr>
             <a:r>
@@ -11842,6 +12480,13 @@
           </a:solidFill>
           <a:ln/>
         </p:spPr>
+        <p:txBody>
+          <a:bodyPr/>
+          <a:lstStyle/>
+          <a:p>
+            <a:endParaRPr lang="en-PH"/>
+          </a:p>
+        </p:txBody>
       </p:sp>
       <p:sp>
         <p:nvSpPr>
@@ -11864,7 +12509,7 @@
           <a:bodyPr wrap="square" lIns="0" tIns="0" rIns="0" bIns="0" rtlCol="0" anchor="ctr"/>
           <a:lstStyle/>
           <a:p>
-            <a:pPr algn="ctr" indent="0" marL="0">
+            <a:pPr marL="0" indent="0" algn="ctr">
               <a:buNone/>
             </a:pPr>
             <a:r>
@@ -11903,7 +12548,7 @@
           <a:bodyPr wrap="square" lIns="0" tIns="0" rIns="0" bIns="0" rtlCol="0" anchor="ctr"/>
           <a:lstStyle/>
           <a:p>
-            <a:pPr algn="r" indent="0" marL="0">
+            <a:pPr marL="0" indent="0" algn="r">
               <a:buNone/>
             </a:pPr>
             <a:r>
@@ -11965,6 +12610,13 @@
           </a:solidFill>
           <a:ln/>
         </p:spPr>
+        <p:txBody>
+          <a:bodyPr/>
+          <a:lstStyle/>
+          <a:p>
+            <a:endParaRPr lang="en-PH"/>
+          </a:p>
+        </p:txBody>
       </p:sp>
       <p:sp>
         <p:nvSpPr>
@@ -11987,7 +12639,7 @@
           <a:bodyPr wrap="square" lIns="0" tIns="0" rIns="0" bIns="0" rtlCol="0" anchor="ctr"/>
           <a:lstStyle/>
           <a:p>
-            <a:pPr indent="0" marL="0">
+            <a:pPr marL="0" indent="0">
               <a:buNone/>
             </a:pPr>
             <a:r>
@@ -12026,7 +12678,7 @@
           <a:bodyPr wrap="square" lIns="0" tIns="0" rIns="0" bIns="0" rtlCol="0" anchor="ctr"/>
           <a:lstStyle/>
           <a:p>
-            <a:pPr indent="0" marL="0">
+            <a:pPr marL="0" indent="0">
               <a:buNone/>
             </a:pPr>
             <a:r>
@@ -12065,6 +12717,13 @@
           </a:solidFill>
           <a:ln/>
         </p:spPr>
+        <p:txBody>
+          <a:bodyPr/>
+          <a:lstStyle/>
+          <a:p>
+            <a:endParaRPr lang="en-PH"/>
+          </a:p>
+        </p:txBody>
       </p:sp>
       <p:sp>
         <p:nvSpPr>
@@ -12087,7 +12746,7 @@
           <a:bodyPr wrap="square" lIns="0" tIns="0" rIns="0" bIns="0" rtlCol="0" anchor="ctr"/>
           <a:lstStyle/>
           <a:p>
-            <a:pPr algn="ctr" indent="0" marL="0">
+            <a:pPr marL="0" indent="0" algn="ctr">
               <a:buNone/>
             </a:pPr>
             <a:r>
@@ -12126,7 +12785,7 @@
           <a:bodyPr wrap="square" lIns="0" tIns="0" rIns="0" bIns="0" rtlCol="0" anchor="t"/>
           <a:lstStyle/>
           <a:p>
-            <a:pPr indent="0" marL="0">
+            <a:pPr marL="0" indent="0">
               <a:lnSpc>
                 <a:spcPct val="106000"/>
               </a:lnSpc>
@@ -12168,7 +12827,7 @@
           <a:bodyPr wrap="square" lIns="0" tIns="0" rIns="0" bIns="0" rtlCol="0" anchor="ctr"/>
           <a:lstStyle/>
           <a:p>
-            <a:pPr indent="0" marL="0">
+            <a:pPr marL="0" indent="0">
               <a:buNone/>
             </a:pPr>
             <a:r>
@@ -12207,6 +12866,13 @@
           </a:solidFill>
           <a:ln/>
         </p:spPr>
+        <p:txBody>
+          <a:bodyPr/>
+          <a:lstStyle/>
+          <a:p>
+            <a:endParaRPr lang="en-PH"/>
+          </a:p>
+        </p:txBody>
       </p:sp>
       <p:sp>
         <p:nvSpPr>
@@ -12229,7 +12895,7 @@
           <a:bodyPr wrap="square" lIns="0" tIns="0" rIns="0" bIns="0" rtlCol="0" anchor="ctr"/>
           <a:lstStyle/>
           <a:p>
-            <a:pPr algn="ctr" indent="0" marL="0">
+            <a:pPr marL="0" indent="0" algn="ctr">
               <a:buNone/>
             </a:pPr>
             <a:r>
@@ -12268,7 +12934,7 @@
           <a:bodyPr wrap="square" lIns="0" tIns="0" rIns="0" bIns="0" rtlCol="0" anchor="ctr"/>
           <a:lstStyle/>
           <a:p>
-            <a:pPr algn="r" indent="0" marL="0">
+            <a:pPr marL="0" indent="0" algn="r">
               <a:buNone/>
             </a:pPr>
             <a:r>
@@ -12330,6 +12996,13 @@
           </a:solidFill>
           <a:ln/>
         </p:spPr>
+        <p:txBody>
+          <a:bodyPr/>
+          <a:lstStyle/>
+          <a:p>
+            <a:endParaRPr lang="en-PH"/>
+          </a:p>
+        </p:txBody>
       </p:sp>
       <p:sp>
         <p:nvSpPr>
@@ -12354,6 +13027,13 @@
             <a:prstDash val="solid"/>
           </a:ln>
         </p:spPr>
+        <p:txBody>
+          <a:bodyPr/>
+          <a:lstStyle/>
+          <a:p>
+            <a:endParaRPr lang="en-PH"/>
+          </a:p>
+        </p:txBody>
       </p:sp>
       <p:sp>
         <p:nvSpPr>
@@ -12376,7 +13056,7 @@
           <a:bodyPr wrap="square" lIns="0" tIns="0" rIns="0" bIns="0" rtlCol="0" anchor="ctr"/>
           <a:lstStyle/>
           <a:p>
-            <a:pPr algn="ctr" indent="0" marL="0">
+            <a:pPr marL="0" indent="0" algn="ctr">
               <a:buNone/>
             </a:pPr>
             <a:r>
@@ -12417,7 +13097,7 @@
           </a:bodyPr>
           <a:lstStyle/>
           <a:p>
-            <a:pPr algn="l" indent="0" marL="0">
+            <a:pPr marL="0" indent="0" algn="l">
               <a:lnSpc>
                 <a:spcPct val="108000"/>
               </a:lnSpc>
@@ -12461,7 +13141,7 @@
           </a:bodyPr>
           <a:lstStyle/>
           <a:p>
-            <a:pPr algn="l" indent="0" marL="0">
+            <a:pPr marL="0" indent="0" algn="l">
               <a:lnSpc>
                 <a:spcPct val="108000"/>
               </a:lnSpc>
@@ -12505,7 +13185,7 @@
           </a:bodyPr>
           <a:lstStyle/>
           <a:p>
-            <a:pPr algn="l" indent="0" marL="0">
+            <a:pPr marL="0" indent="0" algn="l">
               <a:lnSpc>
                 <a:spcPct val="108000"/>
               </a:lnSpc>
@@ -12549,7 +13229,7 @@
           </a:bodyPr>
           <a:lstStyle/>
           <a:p>
-            <a:pPr algn="l" indent="0" marL="0">
+            <a:pPr marL="0" indent="0" algn="l">
               <a:lnSpc>
                 <a:spcPct val="108000"/>
               </a:lnSpc>
@@ -12593,7 +13273,7 @@
           </a:bodyPr>
           <a:lstStyle/>
           <a:p>
-            <a:pPr algn="l" indent="0" marL="0">
+            <a:pPr marL="0" indent="0" algn="l">
               <a:lnSpc>
                 <a:spcPct val="108000"/>
               </a:lnSpc>
@@ -12637,7 +13317,7 @@
           </a:bodyPr>
           <a:lstStyle/>
           <a:p>
-            <a:pPr algn="l" indent="0" marL="0">
+            <a:pPr marL="0" indent="0" algn="l">
               <a:lnSpc>
                 <a:spcPct val="108000"/>
               </a:lnSpc>
@@ -12679,6 +13359,13 @@
           </a:solidFill>
           <a:ln/>
         </p:spPr>
+        <p:txBody>
+          <a:bodyPr/>
+          <a:lstStyle/>
+          <a:p>
+            <a:endParaRPr lang="en-PH"/>
+          </a:p>
+        </p:txBody>
       </p:sp>
       <p:sp>
         <p:nvSpPr>
@@ -12701,7 +13388,7 @@
           <a:bodyPr wrap="square" lIns="0" tIns="0" rIns="0" bIns="0" rtlCol="0" anchor="ctr"/>
           <a:lstStyle/>
           <a:p>
-            <a:pPr algn="ctr" indent="0" marL="0">
+            <a:pPr marL="0" indent="0" algn="ctr">
               <a:buNone/>
             </a:pPr>
             <a:r>
@@ -12740,7 +13427,7 @@
           <a:bodyPr wrap="square" lIns="0" tIns="0" rIns="0" bIns="0" rtlCol="0" anchor="ctr"/>
           <a:lstStyle/>
           <a:p>
-            <a:pPr algn="r" indent="0" marL="0">
+            <a:pPr marL="0" indent="0" algn="r">
               <a:buNone/>
             </a:pPr>
             <a:r>
@@ -12802,6 +13489,13 @@
           </a:solidFill>
           <a:ln/>
         </p:spPr>
+        <p:txBody>
+          <a:bodyPr/>
+          <a:lstStyle/>
+          <a:p>
+            <a:endParaRPr lang="en-PH"/>
+          </a:p>
+        </p:txBody>
       </p:sp>
       <p:sp>
         <p:nvSpPr>
@@ -12824,7 +13518,7 @@
           <a:bodyPr wrap="square" lIns="0" tIns="0" rIns="0" bIns="0" rtlCol="0" anchor="ctr"/>
           <a:lstStyle/>
           <a:p>
-            <a:pPr indent="0" marL="0">
+            <a:pPr marL="0" indent="0">
               <a:buNone/>
             </a:pPr>
             <a:r>
@@ -12863,7 +13557,7 @@
           <a:bodyPr wrap="square" lIns="0" tIns="0" rIns="0" bIns="0" rtlCol="0" anchor="ctr"/>
           <a:lstStyle/>
           <a:p>
-            <a:pPr indent="0" marL="0">
+            <a:pPr marL="0" indent="0">
               <a:buNone/>
             </a:pPr>
             <a:r>
@@ -12902,6 +13596,13 @@
           </a:solidFill>
           <a:ln/>
         </p:spPr>
+        <p:txBody>
+          <a:bodyPr/>
+          <a:lstStyle/>
+          <a:p>
+            <a:endParaRPr lang="en-PH"/>
+          </a:p>
+        </p:txBody>
       </p:sp>
       <p:sp>
         <p:nvSpPr>
@@ -12924,7 +13625,7 @@
           <a:bodyPr wrap="square" lIns="0" tIns="0" rIns="0" bIns="0" rtlCol="0" anchor="ctr"/>
           <a:lstStyle/>
           <a:p>
-            <a:pPr algn="ctr" indent="0" marL="0">
+            <a:pPr marL="0" indent="0" algn="ctr">
               <a:buNone/>
             </a:pPr>
             <a:r>
@@ -12963,7 +13664,7 @@
           <a:bodyPr wrap="square" lIns="0" tIns="0" rIns="0" bIns="0" rtlCol="0" anchor="t"/>
           <a:lstStyle/>
           <a:p>
-            <a:pPr indent="0" marL="0">
+            <a:pPr marL="0" indent="0">
               <a:lnSpc>
                 <a:spcPct val="106000"/>
               </a:lnSpc>
@@ -13005,7 +13706,7 @@
           <a:bodyPr wrap="square" lIns="0" tIns="0" rIns="0" bIns="0" rtlCol="0" anchor="ctr"/>
           <a:lstStyle/>
           <a:p>
-            <a:pPr indent="0" marL="0">
+            <a:pPr marL="0" indent="0">
               <a:buNone/>
             </a:pPr>
             <a:r>
@@ -13044,6 +13745,13 @@
           </a:solidFill>
           <a:ln/>
         </p:spPr>
+        <p:txBody>
+          <a:bodyPr/>
+          <a:lstStyle/>
+          <a:p>
+            <a:endParaRPr lang="en-PH"/>
+          </a:p>
+        </p:txBody>
       </p:sp>
       <p:sp>
         <p:nvSpPr>
@@ -13066,7 +13774,7 @@
           <a:bodyPr wrap="square" lIns="0" tIns="0" rIns="0" bIns="0" rtlCol="0" anchor="ctr"/>
           <a:lstStyle/>
           <a:p>
-            <a:pPr algn="ctr" indent="0" marL="0">
+            <a:pPr marL="0" indent="0" algn="ctr">
               <a:buNone/>
             </a:pPr>
             <a:r>
@@ -13105,7 +13813,7 @@
           <a:bodyPr wrap="square" lIns="0" tIns="0" rIns="0" bIns="0" rtlCol="0" anchor="ctr"/>
           <a:lstStyle/>
           <a:p>
-            <a:pPr algn="r" indent="0" marL="0">
+            <a:pPr marL="0" indent="0" algn="r">
               <a:buNone/>
             </a:pPr>
             <a:r>
@@ -13167,6 +13875,13 @@
           </a:solidFill>
           <a:ln/>
         </p:spPr>
+        <p:txBody>
+          <a:bodyPr/>
+          <a:lstStyle/>
+          <a:p>
+            <a:endParaRPr lang="en-PH"/>
+          </a:p>
+        </p:txBody>
       </p:sp>
       <p:sp>
         <p:nvSpPr>
@@ -13191,6 +13906,13 @@
             <a:prstDash val="solid"/>
           </a:ln>
         </p:spPr>
+        <p:txBody>
+          <a:bodyPr/>
+          <a:lstStyle/>
+          <a:p>
+            <a:endParaRPr lang="en-PH"/>
+          </a:p>
+        </p:txBody>
       </p:sp>
       <p:sp>
         <p:nvSpPr>
@@ -13213,7 +13935,7 @@
           <a:bodyPr wrap="square" lIns="0" tIns="0" rIns="0" bIns="0" rtlCol="0" anchor="ctr"/>
           <a:lstStyle/>
           <a:p>
-            <a:pPr algn="ctr" indent="0" marL="0">
+            <a:pPr marL="0" indent="0" algn="ctr">
               <a:buNone/>
             </a:pPr>
             <a:r>
@@ -13254,7 +13976,7 @@
           </a:bodyPr>
           <a:lstStyle/>
           <a:p>
-            <a:pPr algn="l" indent="0" marL="0">
+            <a:pPr marL="0" indent="0" algn="l">
               <a:lnSpc>
                 <a:spcPct val="108000"/>
               </a:lnSpc>
@@ -13298,7 +14020,7 @@
           </a:bodyPr>
           <a:lstStyle/>
           <a:p>
-            <a:pPr algn="l" indent="0" marL="0">
+            <a:pPr marL="0" indent="0" algn="l">
               <a:lnSpc>
                 <a:spcPct val="108000"/>
               </a:lnSpc>
@@ -13328,7 +14050,7 @@
         <p:spPr>
           <a:xfrm>
             <a:off x="731520" y="2564384"/>
-            <a:ext cx="10725912" cy="414528"/>
+            <a:ext cx="11228832" cy="405384"/>
           </a:xfrm>
           <a:prstGeom prst="rect">
             <a:avLst/>
@@ -13342,7 +14064,7 @@
           </a:bodyPr>
           <a:lstStyle/>
           <a:p>
-            <a:pPr algn="l" indent="0" marL="0">
+            <a:pPr marL="0" indent="0" algn="l">
               <a:lnSpc>
                 <a:spcPct val="108000"/>
               </a:lnSpc>
@@ -13357,7 +14079,51 @@
                 <a:ea typeface="DM Sans" pitchFamily="34" charset="-122"/>
                 <a:cs typeface="DM Sans" pitchFamily="34" charset="-120"/>
               </a:rPr>
-              <a:t>👣 7-Araw na Bantay-Puso — isang maliit na hakbang bawat araw</a:t>
+              <a:t>👣 7-Araw na Bantay-Puso — isang maliit na </a:t>
+            </a:r>
+            <a:r>
+              <a:rPr lang="en-US" sz="2400" dirty="0" err="1">
+                <a:solidFill>
+                  <a:srgbClr val="1A2E22"/>
+                </a:solidFill>
+                <a:latin typeface="DM Sans" pitchFamily="34" charset="0"/>
+                <a:ea typeface="DM Sans" pitchFamily="34" charset="-122"/>
+                <a:cs typeface="DM Sans" pitchFamily="34" charset="-120"/>
+              </a:rPr>
+              <a:t>hakbang</a:t>
+            </a:r>
+            <a:r>
+              <a:rPr lang="en-US" sz="2400" dirty="0">
+                <a:solidFill>
+                  <a:srgbClr val="1A2E22"/>
+                </a:solidFill>
+                <a:latin typeface="DM Sans" pitchFamily="34" charset="0"/>
+                <a:ea typeface="DM Sans" pitchFamily="34" charset="-122"/>
+                <a:cs typeface="DM Sans" pitchFamily="34" charset="-120"/>
+              </a:rPr>
+              <a:t> </a:t>
+            </a:r>
+            <a:r>
+              <a:rPr lang="en-US" sz="2400" dirty="0" err="1">
+                <a:solidFill>
+                  <a:srgbClr val="1A2E22"/>
+                </a:solidFill>
+                <a:latin typeface="DM Sans" pitchFamily="34" charset="0"/>
+                <a:ea typeface="DM Sans" pitchFamily="34" charset="-122"/>
+                <a:cs typeface="DM Sans" pitchFamily="34" charset="-120"/>
+              </a:rPr>
+              <a:t>bawat</a:t>
+            </a:r>
+            <a:r>
+              <a:rPr lang="en-US" sz="2400" dirty="0">
+                <a:solidFill>
+                  <a:srgbClr val="1A2E22"/>
+                </a:solidFill>
+                <a:latin typeface="DM Sans" pitchFamily="34" charset="0"/>
+                <a:ea typeface="DM Sans" pitchFamily="34" charset="-122"/>
+                <a:cs typeface="DM Sans" pitchFamily="34" charset="-120"/>
+              </a:rPr>
+              <a:t> araw</a:t>
             </a:r>
             <a:endParaRPr lang="en-US" sz="2400" dirty="0"/>
           </a:p>
@@ -13386,7 +14152,7 @@
           </a:bodyPr>
           <a:lstStyle/>
           <a:p>
-            <a:pPr algn="l" indent="0" marL="0">
+            <a:pPr marL="0" indent="0" algn="l">
               <a:lnSpc>
                 <a:spcPct val="108000"/>
               </a:lnSpc>
@@ -13430,7 +14196,7 @@
           </a:bodyPr>
           <a:lstStyle/>
           <a:p>
-            <a:pPr algn="l" indent="0" marL="0">
+            <a:pPr marL="0" indent="0" algn="l">
               <a:lnSpc>
                 <a:spcPct val="108000"/>
               </a:lnSpc>
@@ -13474,7 +14240,7 @@
           </a:bodyPr>
           <a:lstStyle/>
           <a:p>
-            <a:pPr algn="l" indent="0" marL="0">
+            <a:pPr marL="0" indent="0" algn="l">
               <a:lnSpc>
                 <a:spcPct val="108000"/>
               </a:lnSpc>
@@ -13516,6 +14282,13 @@
           </a:solidFill>
           <a:ln/>
         </p:spPr>
+        <p:txBody>
+          <a:bodyPr/>
+          <a:lstStyle/>
+          <a:p>
+            <a:endParaRPr lang="en-PH"/>
+          </a:p>
+        </p:txBody>
       </p:sp>
       <p:sp>
         <p:nvSpPr>
@@ -13538,7 +14311,7 @@
           <a:bodyPr wrap="square" lIns="0" tIns="0" rIns="0" bIns="0" rtlCol="0" anchor="ctr"/>
           <a:lstStyle/>
           <a:p>
-            <a:pPr algn="ctr" indent="0" marL="0">
+            <a:pPr marL="0" indent="0" algn="ctr">
               <a:buNone/>
             </a:pPr>
             <a:r>
@@ -13577,7 +14350,7 @@
           <a:bodyPr wrap="square" lIns="0" tIns="0" rIns="0" bIns="0" rtlCol="0" anchor="ctr"/>
           <a:lstStyle/>
           <a:p>
-            <a:pPr algn="r" indent="0" marL="0">
+            <a:pPr marL="0" indent="0" algn="r">
               <a:buNone/>
             </a:pPr>
             <a:r>
@@ -13639,6 +14412,13 @@
           </a:solidFill>
           <a:ln/>
         </p:spPr>
+        <p:txBody>
+          <a:bodyPr/>
+          <a:lstStyle/>
+          <a:p>
+            <a:endParaRPr lang="en-PH"/>
+          </a:p>
+        </p:txBody>
       </p:sp>
       <p:sp>
         <p:nvSpPr>
@@ -13663,6 +14443,13 @@
             <a:prstDash val="solid"/>
           </a:ln>
         </p:spPr>
+        <p:txBody>
+          <a:bodyPr/>
+          <a:lstStyle/>
+          <a:p>
+            <a:endParaRPr lang="en-PH"/>
+          </a:p>
+        </p:txBody>
       </p:sp>
       <p:sp>
         <p:nvSpPr>
@@ -13685,7 +14472,7 @@
           <a:bodyPr wrap="square" lIns="0" tIns="0" rIns="0" bIns="0" rtlCol="0" anchor="ctr"/>
           <a:lstStyle/>
           <a:p>
-            <a:pPr algn="ctr" indent="0" marL="0">
+            <a:pPr marL="0" indent="0" algn="ctr">
               <a:buNone/>
             </a:pPr>
             <a:r>
@@ -13726,7 +14513,7 @@
           </a:bodyPr>
           <a:lstStyle/>
           <a:p>
-            <a:pPr algn="l" indent="0" marL="0">
+            <a:pPr marL="0" indent="0" algn="l">
               <a:lnSpc>
                 <a:spcPct val="108000"/>
               </a:lnSpc>
@@ -13766,11 +14553,11 @@
         </p:spPr>
         <p:txBody>
           <a:bodyPr wrap="square" lIns="0" tIns="0" rIns="0" bIns="0" rtlCol="0" anchor="t">
-            <a:normAutofit/>
+            <a:normAutofit lnSpcReduction="10000"/>
           </a:bodyPr>
           <a:lstStyle/>
           <a:p>
-            <a:pPr algn="l" indent="0" marL="0">
+            <a:pPr marL="0" indent="0" algn="l">
               <a:lnSpc>
                 <a:spcPct val="108000"/>
               </a:lnSpc>
@@ -13814,7 +14601,7 @@
           </a:bodyPr>
           <a:lstStyle/>
           <a:p>
-            <a:pPr algn="l" indent="0" marL="0">
+            <a:pPr marL="0" indent="0" algn="l">
               <a:lnSpc>
                 <a:spcPct val="108000"/>
               </a:lnSpc>
@@ -13856,6 +14643,13 @@
           </a:solidFill>
           <a:ln/>
         </p:spPr>
+        <p:txBody>
+          <a:bodyPr/>
+          <a:lstStyle/>
+          <a:p>
+            <a:endParaRPr lang="en-PH"/>
+          </a:p>
+        </p:txBody>
       </p:sp>
       <p:sp>
         <p:nvSpPr>
@@ -13878,7 +14672,7 @@
           <a:bodyPr wrap="square" lIns="0" tIns="0" rIns="0" bIns="0" rtlCol="0" anchor="ctr"/>
           <a:lstStyle/>
           <a:p>
-            <a:pPr algn="ctr" indent="0" marL="0">
+            <a:pPr marL="0" indent="0" algn="ctr">
               <a:buNone/>
             </a:pPr>
             <a:r>
@@ -13917,7 +14711,7 @@
           <a:bodyPr wrap="square" lIns="0" tIns="0" rIns="0" bIns="0" rtlCol="0" anchor="ctr"/>
           <a:lstStyle/>
           <a:p>
-            <a:pPr algn="r" indent="0" marL="0">
+            <a:pPr marL="0" indent="0" algn="r">
               <a:buNone/>
             </a:pPr>
             <a:r>
@@ -13979,6 +14773,13 @@
           </a:solidFill>
           <a:ln/>
         </p:spPr>
+        <p:txBody>
+          <a:bodyPr/>
+          <a:lstStyle/>
+          <a:p>
+            <a:endParaRPr lang="en-PH"/>
+          </a:p>
+        </p:txBody>
       </p:sp>
       <p:sp>
         <p:nvSpPr>
@@ -14001,7 +14802,7 @@
           <a:bodyPr wrap="square" lIns="0" tIns="0" rIns="0" bIns="0" rtlCol="0" anchor="ctr"/>
           <a:lstStyle/>
           <a:p>
-            <a:pPr indent="0" marL="0">
+            <a:pPr marL="0" indent="0">
               <a:buNone/>
             </a:pPr>
             <a:r>
@@ -14040,7 +14841,7 @@
           <a:bodyPr wrap="square" lIns="0" tIns="0" rIns="0" bIns="0" rtlCol="0" anchor="ctr"/>
           <a:lstStyle/>
           <a:p>
-            <a:pPr indent="0" marL="0">
+            <a:pPr marL="0" indent="0">
               <a:buNone/>
             </a:pPr>
             <a:r>
@@ -14079,6 +14880,13 @@
           </a:solidFill>
           <a:ln/>
         </p:spPr>
+        <p:txBody>
+          <a:bodyPr/>
+          <a:lstStyle/>
+          <a:p>
+            <a:endParaRPr lang="en-PH"/>
+          </a:p>
+        </p:txBody>
       </p:sp>
       <p:sp>
         <p:nvSpPr>
@@ -14101,7 +14909,7 @@
           <a:bodyPr wrap="square" lIns="0" tIns="0" rIns="0" bIns="0" rtlCol="0" anchor="ctr"/>
           <a:lstStyle/>
           <a:p>
-            <a:pPr algn="ctr" indent="0" marL="0">
+            <a:pPr marL="0" indent="0" algn="ctr">
               <a:buNone/>
             </a:pPr>
             <a:r>
@@ -14140,7 +14948,7 @@
           <a:bodyPr wrap="square" lIns="0" tIns="0" rIns="0" bIns="0" rtlCol="0" anchor="t"/>
           <a:lstStyle/>
           <a:p>
-            <a:pPr indent="0" marL="0">
+            <a:pPr marL="0" indent="0">
               <a:lnSpc>
                 <a:spcPct val="106000"/>
               </a:lnSpc>
@@ -14182,7 +14990,7 @@
           <a:bodyPr wrap="square" lIns="0" tIns="0" rIns="0" bIns="0" rtlCol="0" anchor="ctr"/>
           <a:lstStyle/>
           <a:p>
-            <a:pPr indent="0" marL="0">
+            <a:pPr marL="0" indent="0">
               <a:buNone/>
             </a:pPr>
             <a:r>
@@ -14221,6 +15029,13 @@
           </a:solidFill>
           <a:ln/>
         </p:spPr>
+        <p:txBody>
+          <a:bodyPr/>
+          <a:lstStyle/>
+          <a:p>
+            <a:endParaRPr lang="en-PH"/>
+          </a:p>
+        </p:txBody>
       </p:sp>
       <p:sp>
         <p:nvSpPr>
@@ -14243,7 +15058,7 @@
           <a:bodyPr wrap="square" lIns="0" tIns="0" rIns="0" bIns="0" rtlCol="0" anchor="ctr"/>
           <a:lstStyle/>
           <a:p>
-            <a:pPr algn="ctr" indent="0" marL="0">
+            <a:pPr marL="0" indent="0" algn="ctr">
               <a:buNone/>
             </a:pPr>
             <a:r>
@@ -14282,7 +15097,7 @@
           <a:bodyPr wrap="square" lIns="0" tIns="0" rIns="0" bIns="0" rtlCol="0" anchor="ctr"/>
           <a:lstStyle/>
           <a:p>
-            <a:pPr algn="r" indent="0" marL="0">
+            <a:pPr marL="0" indent="0" algn="r">
               <a:buNone/>
             </a:pPr>
             <a:r>
@@ -14344,6 +15159,13 @@
           </a:solidFill>
           <a:ln/>
         </p:spPr>
+        <p:txBody>
+          <a:bodyPr/>
+          <a:lstStyle/>
+          <a:p>
+            <a:endParaRPr lang="en-PH"/>
+          </a:p>
+        </p:txBody>
       </p:sp>
       <p:sp>
         <p:nvSpPr>
@@ -14368,6 +15190,13 @@
             <a:prstDash val="solid"/>
           </a:ln>
         </p:spPr>
+        <p:txBody>
+          <a:bodyPr/>
+          <a:lstStyle/>
+          <a:p>
+            <a:endParaRPr lang="en-PH"/>
+          </a:p>
+        </p:txBody>
       </p:sp>
       <p:sp>
         <p:nvSpPr>
@@ -14390,7 +15219,7 @@
           <a:bodyPr wrap="square" lIns="0" tIns="0" rIns="0" bIns="0" rtlCol="0" anchor="ctr"/>
           <a:lstStyle/>
           <a:p>
-            <a:pPr algn="ctr" indent="0" marL="0">
+            <a:pPr marL="0" indent="0" algn="ctr">
               <a:buNone/>
             </a:pPr>
             <a:r>
@@ -14431,7 +15260,7 @@
           </a:bodyPr>
           <a:lstStyle/>
           <a:p>
-            <a:pPr algn="l" indent="0" marL="0">
+            <a:pPr marL="0" indent="0" algn="l">
               <a:lnSpc>
                 <a:spcPct val="108000"/>
               </a:lnSpc>
@@ -14475,7 +15304,7 @@
           </a:bodyPr>
           <a:lstStyle/>
           <a:p>
-            <a:pPr algn="l" indent="0" marL="0">
+            <a:pPr marL="0" indent="0" algn="l">
               <a:lnSpc>
                 <a:spcPct val="108000"/>
               </a:lnSpc>
@@ -14519,7 +15348,7 @@
           </a:bodyPr>
           <a:lstStyle/>
           <a:p>
-            <a:pPr algn="l" indent="0" marL="0">
+            <a:pPr marL="0" indent="0" algn="l">
               <a:lnSpc>
                 <a:spcPct val="108000"/>
               </a:lnSpc>
@@ -14563,7 +15392,7 @@
           </a:bodyPr>
           <a:lstStyle/>
           <a:p>
-            <a:pPr algn="l" indent="0" marL="0">
+            <a:pPr marL="0" indent="0" algn="l">
               <a:lnSpc>
                 <a:spcPct val="108000"/>
               </a:lnSpc>
@@ -14605,6 +15434,13 @@
           </a:solidFill>
           <a:ln/>
         </p:spPr>
+        <p:txBody>
+          <a:bodyPr/>
+          <a:lstStyle/>
+          <a:p>
+            <a:endParaRPr lang="en-PH"/>
+          </a:p>
+        </p:txBody>
       </p:sp>
       <p:sp>
         <p:nvSpPr>
@@ -14627,7 +15463,7 @@
           <a:bodyPr wrap="square" lIns="0" tIns="0" rIns="0" bIns="0" rtlCol="0" anchor="ctr"/>
           <a:lstStyle/>
           <a:p>
-            <a:pPr algn="ctr" indent="0" marL="0">
+            <a:pPr marL="0" indent="0" algn="ctr">
               <a:buNone/>
             </a:pPr>
             <a:r>
@@ -14666,7 +15502,7 @@
           <a:bodyPr wrap="square" lIns="0" tIns="0" rIns="0" bIns="0" rtlCol="0" anchor="ctr"/>
           <a:lstStyle/>
           <a:p>
-            <a:pPr algn="r" indent="0" marL="0">
+            <a:pPr marL="0" indent="0" algn="r">
               <a:buNone/>
             </a:pPr>
             <a:r>
@@ -14728,6 +15564,13 @@
           </a:solidFill>
           <a:ln/>
         </p:spPr>
+        <p:txBody>
+          <a:bodyPr/>
+          <a:lstStyle/>
+          <a:p>
+            <a:endParaRPr lang="en-PH"/>
+          </a:p>
+        </p:txBody>
       </p:sp>
       <p:sp>
         <p:nvSpPr>
@@ -14750,7 +15593,7 @@
           <a:bodyPr wrap="square" lIns="0" tIns="0" rIns="0" bIns="0" rtlCol="0" anchor="ctr"/>
           <a:lstStyle/>
           <a:p>
-            <a:pPr indent="0" marL="0">
+            <a:pPr marL="0" indent="0">
               <a:buNone/>
             </a:pPr>
             <a:r>
@@ -14789,7 +15632,7 @@
           <a:bodyPr wrap="square" lIns="0" tIns="0" rIns="0" bIns="0" rtlCol="0" anchor="ctr"/>
           <a:lstStyle/>
           <a:p>
-            <a:pPr indent="0" marL="0">
+            <a:pPr marL="0" indent="0">
               <a:buNone/>
             </a:pPr>
             <a:r>
@@ -14828,6 +15671,13 @@
           </a:solidFill>
           <a:ln/>
         </p:spPr>
+        <p:txBody>
+          <a:bodyPr/>
+          <a:lstStyle/>
+          <a:p>
+            <a:endParaRPr lang="en-PH"/>
+          </a:p>
+        </p:txBody>
       </p:sp>
       <p:sp>
         <p:nvSpPr>
@@ -14850,7 +15700,7 @@
           <a:bodyPr wrap="square" lIns="0" tIns="0" rIns="0" bIns="0" rtlCol="0" anchor="ctr"/>
           <a:lstStyle/>
           <a:p>
-            <a:pPr algn="ctr" indent="0" marL="0">
+            <a:pPr marL="0" indent="0" algn="ctr">
               <a:buNone/>
             </a:pPr>
             <a:r>
@@ -14889,7 +15739,7 @@
           <a:bodyPr wrap="square" lIns="0" tIns="0" rIns="0" bIns="0" rtlCol="0" anchor="t"/>
           <a:lstStyle/>
           <a:p>
-            <a:pPr indent="0" marL="0">
+            <a:pPr marL="0" indent="0">
               <a:lnSpc>
                 <a:spcPct val="106000"/>
               </a:lnSpc>
@@ -14931,7 +15781,7 @@
           <a:bodyPr wrap="square" lIns="0" tIns="0" rIns="0" bIns="0" rtlCol="0" anchor="ctr"/>
           <a:lstStyle/>
           <a:p>
-            <a:pPr indent="0" marL="0">
+            <a:pPr marL="0" indent="0">
               <a:buNone/>
             </a:pPr>
             <a:r>
@@ -14970,6 +15820,13 @@
           </a:solidFill>
           <a:ln/>
         </p:spPr>
+        <p:txBody>
+          <a:bodyPr/>
+          <a:lstStyle/>
+          <a:p>
+            <a:endParaRPr lang="en-PH"/>
+          </a:p>
+        </p:txBody>
       </p:sp>
       <p:sp>
         <p:nvSpPr>
@@ -14992,7 +15849,7 @@
           <a:bodyPr wrap="square" lIns="0" tIns="0" rIns="0" bIns="0" rtlCol="0" anchor="ctr"/>
           <a:lstStyle/>
           <a:p>
-            <a:pPr algn="ctr" indent="0" marL="0">
+            <a:pPr marL="0" indent="0" algn="ctr">
               <a:buNone/>
             </a:pPr>
             <a:r>
@@ -15031,7 +15888,7 @@
           <a:bodyPr wrap="square" lIns="0" tIns="0" rIns="0" bIns="0" rtlCol="0" anchor="ctr"/>
           <a:lstStyle/>
           <a:p>
-            <a:pPr algn="r" indent="0" marL="0">
+            <a:pPr marL="0" indent="0" algn="r">
               <a:buNone/>
             </a:pPr>
             <a:r>
@@ -15093,6 +15950,13 @@
           </a:solidFill>
           <a:ln/>
         </p:spPr>
+        <p:txBody>
+          <a:bodyPr/>
+          <a:lstStyle/>
+          <a:p>
+            <a:endParaRPr lang="en-PH"/>
+          </a:p>
+        </p:txBody>
       </p:sp>
       <p:sp>
         <p:nvSpPr>
@@ -15117,6 +15981,13 @@
             <a:prstDash val="solid"/>
           </a:ln>
         </p:spPr>
+        <p:txBody>
+          <a:bodyPr/>
+          <a:lstStyle/>
+          <a:p>
+            <a:endParaRPr lang="en-PH"/>
+          </a:p>
+        </p:txBody>
       </p:sp>
       <p:sp>
         <p:nvSpPr>
@@ -15139,7 +16010,7 @@
           <a:bodyPr wrap="square" lIns="0" tIns="0" rIns="0" bIns="0" rtlCol="0" anchor="ctr"/>
           <a:lstStyle/>
           <a:p>
-            <a:pPr algn="ctr" indent="0" marL="0">
+            <a:pPr marL="0" indent="0" algn="ctr">
               <a:buNone/>
             </a:pPr>
             <a:r>
@@ -15176,11 +16047,11 @@
         </p:spPr>
         <p:txBody>
           <a:bodyPr wrap="square" lIns="0" tIns="0" rIns="0" bIns="0" rtlCol="0" anchor="t">
-            <a:normAutofit/>
+            <a:normAutofit lnSpcReduction="10000"/>
           </a:bodyPr>
           <a:lstStyle/>
           <a:p>
-            <a:pPr algn="l" indent="0" marL="0">
+            <a:pPr marL="0" indent="0" algn="l">
               <a:lnSpc>
                 <a:spcPct val="108000"/>
               </a:lnSpc>
@@ -15220,11 +16091,11 @@
         </p:spPr>
         <p:txBody>
           <a:bodyPr wrap="square" lIns="0" tIns="0" rIns="0" bIns="0" rtlCol="0" anchor="t">
-            <a:normAutofit/>
+            <a:normAutofit lnSpcReduction="10000"/>
           </a:bodyPr>
           <a:lstStyle/>
           <a:p>
-            <a:pPr algn="l" indent="0" marL="0">
+            <a:pPr marL="0" indent="0" algn="l">
               <a:lnSpc>
                 <a:spcPct val="108000"/>
               </a:lnSpc>
@@ -15268,7 +16139,7 @@
           </a:bodyPr>
           <a:lstStyle/>
           <a:p>
-            <a:pPr algn="l" indent="0" marL="0">
+            <a:pPr marL="0" indent="0" algn="l">
               <a:lnSpc>
                 <a:spcPct val="108000"/>
               </a:lnSpc>
@@ -15310,6 +16181,13 @@
           </a:solidFill>
           <a:ln/>
         </p:spPr>
+        <p:txBody>
+          <a:bodyPr/>
+          <a:lstStyle/>
+          <a:p>
+            <a:endParaRPr lang="en-PH"/>
+          </a:p>
+        </p:txBody>
       </p:sp>
       <p:sp>
         <p:nvSpPr>
@@ -15332,7 +16210,7 @@
           <a:bodyPr wrap="square" lIns="0" tIns="0" rIns="0" bIns="0" rtlCol="0" anchor="ctr"/>
           <a:lstStyle/>
           <a:p>
-            <a:pPr algn="ctr" indent="0" marL="0">
+            <a:pPr marL="0" indent="0" algn="ctr">
               <a:buNone/>
             </a:pPr>
             <a:r>
@@ -15371,7 +16249,7 @@
           <a:bodyPr wrap="square" lIns="0" tIns="0" rIns="0" bIns="0" rtlCol="0" anchor="ctr"/>
           <a:lstStyle/>
           <a:p>
-            <a:pPr algn="r" indent="0" marL="0">
+            <a:pPr marL="0" indent="0" algn="r">
               <a:buNone/>
             </a:pPr>
             <a:r>
@@ -15433,6 +16311,13 @@
           </a:solidFill>
           <a:ln/>
         </p:spPr>
+        <p:txBody>
+          <a:bodyPr/>
+          <a:lstStyle/>
+          <a:p>
+            <a:endParaRPr lang="en-PH"/>
+          </a:p>
+        </p:txBody>
       </p:sp>
       <p:sp>
         <p:nvSpPr>
@@ -15457,6 +16342,13 @@
             <a:prstDash val="solid"/>
           </a:ln>
         </p:spPr>
+        <p:txBody>
+          <a:bodyPr/>
+          <a:lstStyle/>
+          <a:p>
+            <a:endParaRPr lang="en-PH"/>
+          </a:p>
+        </p:txBody>
       </p:sp>
       <p:sp>
         <p:nvSpPr>
@@ -15479,7 +16371,7 @@
           <a:bodyPr wrap="square" lIns="0" tIns="0" rIns="0" bIns="0" rtlCol="0" anchor="ctr"/>
           <a:lstStyle/>
           <a:p>
-            <a:pPr algn="ctr" indent="0" marL="0">
+            <a:pPr marL="0" indent="0" algn="ctr">
               <a:buNone/>
             </a:pPr>
             <a:r>
@@ -15516,11 +16408,11 @@
         </p:spPr>
         <p:txBody>
           <a:bodyPr wrap="square" lIns="0" tIns="0" rIns="0" bIns="0" rtlCol="0" anchor="t">
-            <a:normAutofit/>
+            <a:normAutofit lnSpcReduction="10000"/>
           </a:bodyPr>
           <a:lstStyle/>
           <a:p>
-            <a:pPr algn="l" indent="0" marL="0">
+            <a:pPr marL="0" indent="0" algn="l">
               <a:lnSpc>
                 <a:spcPct val="108000"/>
               </a:lnSpc>
@@ -15564,7 +16456,7 @@
           </a:bodyPr>
           <a:lstStyle/>
           <a:p>
-            <a:pPr algn="l" indent="0" marL="0">
+            <a:pPr marL="0" indent="0" algn="l">
               <a:lnSpc>
                 <a:spcPct val="108000"/>
               </a:lnSpc>
@@ -15604,11 +16496,11 @@
         </p:spPr>
         <p:txBody>
           <a:bodyPr wrap="square" lIns="0" tIns="0" rIns="0" bIns="0" rtlCol="0" anchor="t">
-            <a:normAutofit/>
+            <a:normAutofit lnSpcReduction="10000"/>
           </a:bodyPr>
           <a:lstStyle/>
           <a:p>
-            <a:pPr algn="l" indent="0" marL="0">
+            <a:pPr marL="0" indent="0" algn="l">
               <a:lnSpc>
                 <a:spcPct val="108000"/>
               </a:lnSpc>
@@ -15648,11 +16540,11 @@
         </p:spPr>
         <p:txBody>
           <a:bodyPr wrap="square" lIns="0" tIns="0" rIns="0" bIns="0" rtlCol="0" anchor="t">
-            <a:normAutofit/>
+            <a:normAutofit lnSpcReduction="10000"/>
           </a:bodyPr>
           <a:lstStyle/>
           <a:p>
-            <a:pPr algn="l" indent="0" marL="0">
+            <a:pPr marL="0" indent="0" algn="l">
               <a:lnSpc>
                 <a:spcPct val="108000"/>
               </a:lnSpc>
@@ -15694,6 +16586,13 @@
           </a:solidFill>
           <a:ln/>
         </p:spPr>
+        <p:txBody>
+          <a:bodyPr/>
+          <a:lstStyle/>
+          <a:p>
+            <a:endParaRPr lang="en-PH"/>
+          </a:p>
+        </p:txBody>
       </p:sp>
       <p:sp>
         <p:nvSpPr>
@@ -15716,7 +16615,7 @@
           <a:bodyPr wrap="square" lIns="0" tIns="0" rIns="0" bIns="0" rtlCol="0" anchor="ctr"/>
           <a:lstStyle/>
           <a:p>
-            <a:pPr algn="ctr" indent="0" marL="0">
+            <a:pPr marL="0" indent="0" algn="ctr">
               <a:buNone/>
             </a:pPr>
             <a:r>
@@ -15755,7 +16654,7 @@
           <a:bodyPr wrap="square" lIns="0" tIns="0" rIns="0" bIns="0" rtlCol="0" anchor="ctr"/>
           <a:lstStyle/>
           <a:p>
-            <a:pPr algn="r" indent="0" marL="0">
+            <a:pPr marL="0" indent="0" algn="r">
               <a:buNone/>
             </a:pPr>
             <a:r>
@@ -15817,6 +16716,13 @@
           </a:solidFill>
           <a:ln/>
         </p:spPr>
+        <p:txBody>
+          <a:bodyPr/>
+          <a:lstStyle/>
+          <a:p>
+            <a:endParaRPr lang="en-PH"/>
+          </a:p>
+        </p:txBody>
       </p:sp>
       <p:sp>
         <p:nvSpPr>
@@ -15841,6 +16747,13 @@
             <a:prstDash val="solid"/>
           </a:ln>
         </p:spPr>
+        <p:txBody>
+          <a:bodyPr/>
+          <a:lstStyle/>
+          <a:p>
+            <a:endParaRPr lang="en-PH"/>
+          </a:p>
+        </p:txBody>
       </p:sp>
       <p:sp>
         <p:nvSpPr>
@@ -15863,7 +16776,7 @@
           <a:bodyPr wrap="square" lIns="0" tIns="0" rIns="0" bIns="0" rtlCol="0" anchor="ctr"/>
           <a:lstStyle/>
           <a:p>
-            <a:pPr algn="ctr" indent="0" marL="0">
+            <a:pPr marL="0" indent="0" algn="ctr">
               <a:buNone/>
             </a:pPr>
             <a:r>
@@ -15900,11 +16813,11 @@
         </p:spPr>
         <p:txBody>
           <a:bodyPr wrap="square" lIns="0" tIns="0" rIns="0" bIns="0" rtlCol="0" anchor="t">
-            <a:normAutofit/>
+            <a:normAutofit lnSpcReduction="10000"/>
           </a:bodyPr>
           <a:lstStyle/>
           <a:p>
-            <a:pPr algn="l" indent="0" marL="0">
+            <a:pPr marL="0" indent="0" algn="l">
               <a:lnSpc>
                 <a:spcPct val="108000"/>
               </a:lnSpc>
@@ -15948,7 +16861,7 @@
           </a:bodyPr>
           <a:lstStyle/>
           <a:p>
-            <a:pPr algn="l" indent="0" marL="0">
+            <a:pPr marL="0" indent="0" algn="l">
               <a:lnSpc>
                 <a:spcPct val="108000"/>
               </a:lnSpc>
@@ -15988,11 +16901,11 @@
         </p:spPr>
         <p:txBody>
           <a:bodyPr wrap="square" lIns="0" tIns="0" rIns="0" bIns="0" rtlCol="0" anchor="t">
-            <a:normAutofit/>
+            <a:normAutofit lnSpcReduction="10000"/>
           </a:bodyPr>
           <a:lstStyle/>
           <a:p>
-            <a:pPr algn="l" indent="0" marL="0">
+            <a:pPr marL="0" indent="0" algn="l">
               <a:lnSpc>
                 <a:spcPct val="108000"/>
               </a:lnSpc>
@@ -16032,11 +16945,11 @@
         </p:spPr>
         <p:txBody>
           <a:bodyPr wrap="square" lIns="0" tIns="0" rIns="0" bIns="0" rtlCol="0" anchor="t">
-            <a:normAutofit/>
+            <a:normAutofit lnSpcReduction="10000"/>
           </a:bodyPr>
           <a:lstStyle/>
           <a:p>
-            <a:pPr algn="l" indent="0" marL="0">
+            <a:pPr marL="0" indent="0" algn="l">
               <a:lnSpc>
                 <a:spcPct val="108000"/>
               </a:lnSpc>
@@ -16078,6 +16991,13 @@
           </a:solidFill>
           <a:ln/>
         </p:spPr>
+        <p:txBody>
+          <a:bodyPr/>
+          <a:lstStyle/>
+          <a:p>
+            <a:endParaRPr lang="en-PH"/>
+          </a:p>
+        </p:txBody>
       </p:sp>
       <p:sp>
         <p:nvSpPr>
@@ -16100,7 +17020,7 @@
           <a:bodyPr wrap="square" lIns="0" tIns="0" rIns="0" bIns="0" rtlCol="0" anchor="ctr"/>
           <a:lstStyle/>
           <a:p>
-            <a:pPr algn="ctr" indent="0" marL="0">
+            <a:pPr marL="0" indent="0" algn="ctr">
               <a:buNone/>
             </a:pPr>
             <a:r>
@@ -16139,7 +17059,7 @@
           <a:bodyPr wrap="square" lIns="0" tIns="0" rIns="0" bIns="0" rtlCol="0" anchor="ctr"/>
           <a:lstStyle/>
           <a:p>
-            <a:pPr algn="r" indent="0" marL="0">
+            <a:pPr marL="0" indent="0" algn="r">
               <a:buNone/>
             </a:pPr>
             <a:r>
@@ -16458,4 +17378,319 @@
     </a:ext>
   </a:extLst>
 </a:theme>
+</file>
+
+<file path=ppt/theme/theme2.xml><?xml version="1.0" encoding="utf-8"?>
+<a:theme xmlns:a="http://schemas.openxmlformats.org/drawingml/2006/main" name="Office Theme">
+  <a:themeElements>
+    <a:clrScheme name="Office">
+      <a:dk1>
+        <a:sysClr val="windowText" lastClr="000000"/>
+      </a:dk1>
+      <a:lt1>
+        <a:sysClr val="window" lastClr="FFFFFF"/>
+      </a:lt1>
+      <a:dk2>
+        <a:srgbClr val="0E2841"/>
+      </a:dk2>
+      <a:lt2>
+        <a:srgbClr val="E8E8E8"/>
+      </a:lt2>
+      <a:accent1>
+        <a:srgbClr val="156082"/>
+      </a:accent1>
+      <a:accent2>
+        <a:srgbClr val="E97132"/>
+      </a:accent2>
+      <a:accent3>
+        <a:srgbClr val="196B24"/>
+      </a:accent3>
+      <a:accent4>
+        <a:srgbClr val="0F9ED5"/>
+      </a:accent4>
+      <a:accent5>
+        <a:srgbClr val="A02B93"/>
+      </a:accent5>
+      <a:accent6>
+        <a:srgbClr val="4EA72E"/>
+      </a:accent6>
+      <a:hlink>
+        <a:srgbClr val="467886"/>
+      </a:hlink>
+      <a:folHlink>
+        <a:srgbClr val="96607D"/>
+      </a:folHlink>
+    </a:clrScheme>
+    <a:fontScheme name="Office">
+      <a:majorFont>
+        <a:latin typeface="Aptos Display" panose="02110004020202020204"/>
+        <a:ea typeface=""/>
+        <a:cs typeface=""/>
+        <a:font script="Jpan" typeface="游ゴシック Light"/>
+        <a:font script="Hang" typeface="맑은 고딕"/>
+        <a:font script="Hans" typeface="等线 Light"/>
+        <a:font script="Hant" typeface="新細明體"/>
+        <a:font script="Arab" typeface="Times New Roman"/>
+        <a:font script="Hebr" typeface="Times New Roman"/>
+        <a:font script="Thai" typeface="Angsana New"/>
+        <a:font script="Ethi" typeface="Nyala"/>
+        <a:font script="Beng" typeface="Vrinda"/>
+        <a:font script="Gujr" typeface="Shruti"/>
+        <a:font script="Khmr" typeface="MoolBoran"/>
+        <a:font script="Knda" typeface="Tunga"/>
+        <a:font script="Guru" typeface="Raavi"/>
+        <a:font script="Cans" typeface="Euphemia"/>
+        <a:font script="Cher" typeface="Plantagenet Cherokee"/>
+        <a:font script="Yiii" typeface="Microsoft Yi Baiti"/>
+        <a:font script="Tibt" typeface="Microsoft Himalaya"/>
+        <a:font script="Thaa" typeface="MV Boli"/>
+        <a:font script="Deva" typeface="Mangal"/>
+        <a:font script="Telu" typeface="Gautami"/>
+        <a:font script="Taml" typeface="Latha"/>
+        <a:font script="Syrc" typeface="Estrangelo Edessa"/>
+        <a:font script="Orya" typeface="Kalinga"/>
+        <a:font script="Mlym" typeface="Kartika"/>
+        <a:font script="Laoo" typeface="DokChampa"/>
+        <a:font script="Sinh" typeface="Iskoola Pota"/>
+        <a:font script="Mong" typeface="Mongolian Baiti"/>
+        <a:font script="Viet" typeface="Times New Roman"/>
+        <a:font script="Uigh" typeface="Microsoft Uighur"/>
+        <a:font script="Geor" typeface="Sylfaen"/>
+        <a:font script="Armn" typeface="Arial"/>
+        <a:font script="Bugi" typeface="Leelawadee UI"/>
+        <a:font script="Bopo" typeface="Microsoft JhengHei"/>
+        <a:font script="Java" typeface="Javanese Text"/>
+        <a:font script="Lisu" typeface="Segoe UI"/>
+        <a:font script="Mymr" typeface="Myanmar Text"/>
+        <a:font script="Nkoo" typeface="Ebrima"/>
+        <a:font script="Olck" typeface="Nirmala UI"/>
+        <a:font script="Osma" typeface="Ebrima"/>
+        <a:font script="Phag" typeface="Phagspa"/>
+        <a:font script="Syrn" typeface="Estrangelo Edessa"/>
+        <a:font script="Syrj" typeface="Estrangelo Edessa"/>
+        <a:font script="Syre" typeface="Estrangelo Edessa"/>
+        <a:font script="Sora" typeface="Nirmala UI"/>
+        <a:font script="Tale" typeface="Microsoft Tai Le"/>
+        <a:font script="Talu" typeface="Microsoft New Tai Lue"/>
+        <a:font script="Tfng" typeface="Ebrima"/>
+      </a:majorFont>
+      <a:minorFont>
+        <a:latin typeface="Aptos" panose="02110004020202020204"/>
+        <a:ea typeface=""/>
+        <a:cs typeface=""/>
+        <a:font script="Jpan" typeface="游ゴシック"/>
+        <a:font script="Hang" typeface="맑은 고딕"/>
+        <a:font script="Hans" typeface="等线"/>
+        <a:font script="Hant" typeface="新細明體"/>
+        <a:font script="Arab" typeface="Arial"/>
+        <a:font script="Hebr" typeface="Arial"/>
+        <a:font script="Thai" typeface="Cordia New"/>
+        <a:font script="Ethi" typeface="Nyala"/>
+        <a:font script="Beng" typeface="Vrinda"/>
+        <a:font script="Gujr" typeface="Shruti"/>
+        <a:font script="Khmr" typeface="DaunPenh"/>
+        <a:font script="Knda" typeface="Tunga"/>
+        <a:font script="Guru" typeface="Raavi"/>
+        <a:font script="Cans" typeface="Euphemia"/>
+        <a:font script="Cher" typeface="Plantagenet Cherokee"/>
+        <a:font script="Yiii" typeface="Microsoft Yi Baiti"/>
+        <a:font script="Tibt" typeface="Microsoft Himalaya"/>
+        <a:font script="Thaa" typeface="MV Boli"/>
+        <a:font script="Deva" typeface="Mangal"/>
+        <a:font script="Telu" typeface="Gautami"/>
+        <a:font script="Taml" typeface="Latha"/>
+        <a:font script="Syrc" typeface="Estrangelo Edessa"/>
+        <a:font script="Orya" typeface="Kalinga"/>
+        <a:font script="Mlym" typeface="Kartika"/>
+        <a:font script="Laoo" typeface="DokChampa"/>
+        <a:font script="Sinh" typeface="Iskoola Pota"/>
+        <a:font script="Mong" typeface="Mongolian Baiti"/>
+        <a:font script="Viet" typeface="Arial"/>
+        <a:font script="Uigh" typeface="Microsoft Uighur"/>
+        <a:font script="Geor" typeface="Sylfaen"/>
+        <a:font script="Armn" typeface="Arial"/>
+        <a:font script="Bugi" typeface="Leelawadee UI"/>
+        <a:font script="Bopo" typeface="Microsoft JhengHei"/>
+        <a:font script="Java" typeface="Javanese Text"/>
+        <a:font script="Lisu" typeface="Segoe UI"/>
+        <a:font script="Mymr" typeface="Myanmar Text"/>
+        <a:font script="Nkoo" typeface="Ebrima"/>
+        <a:font script="Olck" typeface="Nirmala UI"/>
+        <a:font script="Osma" typeface="Ebrima"/>
+        <a:font script="Phag" typeface="Phagspa"/>
+        <a:font script="Syrn" typeface="Estrangelo Edessa"/>
+        <a:font script="Syrj" typeface="Estrangelo Edessa"/>
+        <a:font script="Syre" typeface="Estrangelo Edessa"/>
+        <a:font script="Sora" typeface="Nirmala UI"/>
+        <a:font script="Tale" typeface="Microsoft Tai Le"/>
+        <a:font script="Talu" typeface="Microsoft New Tai Lue"/>
+        <a:font script="Tfng" typeface="Ebrima"/>
+      </a:minorFont>
+    </a:fontScheme>
+    <a:fmtScheme name="Office">
+      <a:fillStyleLst>
+        <a:solidFill>
+          <a:schemeClr val="phClr"/>
+        </a:solidFill>
+        <a:gradFill rotWithShape="1">
+          <a:gsLst>
+            <a:gs pos="0">
+              <a:schemeClr val="phClr">
+                <a:lumMod val="110000"/>
+                <a:satMod val="105000"/>
+                <a:tint val="67000"/>
+              </a:schemeClr>
+            </a:gs>
+            <a:gs pos="50000">
+              <a:schemeClr val="phClr">
+                <a:lumMod val="105000"/>
+                <a:satMod val="103000"/>
+                <a:tint val="73000"/>
+              </a:schemeClr>
+            </a:gs>
+            <a:gs pos="100000">
+              <a:schemeClr val="phClr">
+                <a:lumMod val="105000"/>
+                <a:satMod val="109000"/>
+                <a:tint val="81000"/>
+              </a:schemeClr>
+            </a:gs>
+          </a:gsLst>
+          <a:lin ang="5400000" scaled="0"/>
+        </a:gradFill>
+        <a:gradFill rotWithShape="1">
+          <a:gsLst>
+            <a:gs pos="0">
+              <a:schemeClr val="phClr">
+                <a:satMod val="103000"/>
+                <a:lumMod val="102000"/>
+                <a:tint val="94000"/>
+              </a:schemeClr>
+            </a:gs>
+            <a:gs pos="50000">
+              <a:schemeClr val="phClr">
+                <a:satMod val="110000"/>
+                <a:lumMod val="100000"/>
+                <a:shade val="100000"/>
+              </a:schemeClr>
+            </a:gs>
+            <a:gs pos="100000">
+              <a:schemeClr val="phClr">
+                <a:lumMod val="99000"/>
+                <a:satMod val="120000"/>
+                <a:shade val="78000"/>
+              </a:schemeClr>
+            </a:gs>
+          </a:gsLst>
+          <a:lin ang="5400000" scaled="0"/>
+        </a:gradFill>
+      </a:fillStyleLst>
+      <a:lnStyleLst>
+        <a:ln w="12700" cap="flat" cmpd="sng" algn="ctr">
+          <a:solidFill>
+            <a:schemeClr val="phClr"/>
+          </a:solidFill>
+          <a:prstDash val="solid"/>
+          <a:miter lim="800000"/>
+        </a:ln>
+        <a:ln w="19050" cap="flat" cmpd="sng" algn="ctr">
+          <a:solidFill>
+            <a:schemeClr val="phClr"/>
+          </a:solidFill>
+          <a:prstDash val="solid"/>
+          <a:miter lim="800000"/>
+        </a:ln>
+        <a:ln w="25400" cap="flat" cmpd="sng" algn="ctr">
+          <a:solidFill>
+            <a:schemeClr val="phClr"/>
+          </a:solidFill>
+          <a:prstDash val="solid"/>
+          <a:miter lim="800000"/>
+        </a:ln>
+      </a:lnStyleLst>
+      <a:effectStyleLst>
+        <a:effectStyle>
+          <a:effectLst/>
+        </a:effectStyle>
+        <a:effectStyle>
+          <a:effectLst/>
+        </a:effectStyle>
+        <a:effectStyle>
+          <a:effectLst>
+            <a:outerShdw blurRad="57150" dist="19050" dir="5400000" algn="ctr" rotWithShape="0">
+              <a:srgbClr val="000000">
+                <a:alpha val="63000"/>
+              </a:srgbClr>
+            </a:outerShdw>
+          </a:effectLst>
+        </a:effectStyle>
+      </a:effectStyleLst>
+      <a:bgFillStyleLst>
+        <a:solidFill>
+          <a:schemeClr val="phClr"/>
+        </a:solidFill>
+        <a:solidFill>
+          <a:schemeClr val="phClr">
+            <a:tint val="95000"/>
+            <a:satMod val="170000"/>
+          </a:schemeClr>
+        </a:solidFill>
+        <a:gradFill rotWithShape="1">
+          <a:gsLst>
+            <a:gs pos="0">
+              <a:schemeClr val="phClr">
+                <a:tint val="93000"/>
+                <a:satMod val="150000"/>
+                <a:shade val="98000"/>
+                <a:lumMod val="102000"/>
+              </a:schemeClr>
+            </a:gs>
+            <a:gs pos="50000">
+              <a:schemeClr val="phClr">
+                <a:tint val="98000"/>
+                <a:satMod val="130000"/>
+                <a:shade val="90000"/>
+                <a:lumMod val="103000"/>
+              </a:schemeClr>
+            </a:gs>
+            <a:gs pos="100000">
+              <a:schemeClr val="phClr">
+                <a:shade val="63000"/>
+                <a:satMod val="120000"/>
+              </a:schemeClr>
+            </a:gs>
+          </a:gsLst>
+          <a:lin ang="5400000" scaled="0"/>
+        </a:gradFill>
+      </a:bgFillStyleLst>
+    </a:fmtScheme>
+  </a:themeElements>
+  <a:objectDefaults>
+    <a:lnDef>
+      <a:spPr/>
+      <a:bodyPr/>
+      <a:lstStyle/>
+      <a:style>
+        <a:lnRef idx="2">
+          <a:schemeClr val="accent1"/>
+        </a:lnRef>
+        <a:fillRef idx="0">
+          <a:schemeClr val="accent1"/>
+        </a:fillRef>
+        <a:effectRef idx="1">
+          <a:schemeClr val="accent1"/>
+        </a:effectRef>
+        <a:fontRef idx="minor">
+          <a:schemeClr val="tx1"/>
+        </a:fontRef>
+      </a:style>
+    </a:lnDef>
+  </a:objectDefaults>
+  <a:extraClrSchemeLst/>
+  <a:extLst>
+    <a:ext uri="{05A4C25C-085E-4340-85A3-A5531E510DB2}">
+      <thm15:themeFamily xmlns:thm15="http://schemas.microsoft.com/office/thememl/2012/main" name="Office Theme" id="{2E142A2C-CD16-42D6-873A-C26D2A0506FA}" vid="{1BDDFF52-6CD6-40A5-AB3C-68EB2F1E4D0A}"/>
+    </a:ext>
+  </a:extLst>
+</a:theme>
 </file>
--- a/lessons/btli101_xrw5fg/btli1_l10_slides.pptx
+++ b/lessons/btli101_xrw5fg/btli1_l10_slides.pptx
@@ -1392,11 +1392,11 @@
           <a:p>
             <a:r>
               <a:rPr lang="en-US" b="1" dirty="0"/>
-              <a:t>Ipaguhitan sa guide</a:t>
-            </a:r>
-            <a:r>
-              <a:rPr lang="en-US" dirty="0"/>
-              <a:t> ang dahilan kung bakit ginawa ni Jesus ang Kaniyang ginawa: binigyan ko kayo ng halimbawa upang inyong tularan.</a:t>
+              <a:t>Ipa-tap sa guide para guhitan</a:t>
+            </a:r>
+            <a:r>
+              <a:rPr lang="en-US" dirty="0"/>
+              <a:t> ang dahilan kung bakit ginawa ni Jesus ang Kaniyang ginawa: binigyan ko kayo ng halimbawa upang inyong tularan (sa printed guide, guhitan ng pen).</a:t>
             </a:r>
           </a:p>
         </p:txBody>
@@ -4580,11 +4580,11 @@
           <a:p>
             <a:r>
               <a:rPr lang="en-US" b="1" dirty="0"/>
-              <a:t>Ipalagay sa guide: </a:t>
-            </a:r>
-            <a:r>
-              <a:rPr lang="en-US" dirty="0"/>
-              <a:t>ekis sa salitang tamad, check sa magpakasipag at maglingkod.</a:t>
+              <a:t>Ipa-tap sa guide: </a:t>
+            </a:r>
+            <a:r>
+              <a:rPr lang="en-US" dirty="0"/>
+              <a:t>ekis sa salitang tamad, check sa magpakasipag at maglingkod (sa printed guide, gamitin ang pen).</a:t>
             </a:r>
           </a:p>
           <a:p>
